--- a/docs/plots/grant/jx_grant_linsubhr_diff_grade2.pptx
+++ b/docs/plots/grant/jx_grant_linsubhr_diff_grade2.pptx
@@ -2271,7 +2271,7 @@
           </p:nvSpPr>
           <p:spPr>
             <a:xfrm>
-              <a:off x="915645" y="5038294"/>
+              <a:off x="915645" y="5067975"/>
               <a:ext cx="7682587" cy="0"/>
             </a:xfrm>
             <a:custGeom>
@@ -2314,7 +2314,7 @@
           </p:nvSpPr>
           <p:spPr>
             <a:xfrm>
-              <a:off x="915645" y="4273666"/>
+              <a:off x="915645" y="4288924"/>
               <a:ext cx="7682587" cy="0"/>
             </a:xfrm>
             <a:custGeom>
@@ -2357,7 +2357,7 @@
           </p:nvSpPr>
           <p:spPr>
             <a:xfrm>
-              <a:off x="915645" y="3509037"/>
+              <a:off x="915645" y="3509873"/>
               <a:ext cx="7682587" cy="0"/>
             </a:xfrm>
             <a:custGeom>
@@ -2400,7 +2400,7 @@
           </p:nvSpPr>
           <p:spPr>
             <a:xfrm>
-              <a:off x="915645" y="2744409"/>
+              <a:off x="915645" y="2730822"/>
               <a:ext cx="7682587" cy="0"/>
             </a:xfrm>
             <a:custGeom>
@@ -2443,15 +2443,15 @@
           </p:nvSpPr>
           <p:spPr>
             <a:xfrm>
-              <a:off x="1701364" y="2209169"/>
-              <a:ext cx="0" cy="3364365"/>
+              <a:off x="1264853" y="2185486"/>
+              <a:ext cx="0" cy="3427824"/>
             </a:xfrm>
             <a:custGeom>
               <a:avLst/>
               <a:pathLst>
-                <a:path w="0" h="3364365">
+                <a:path w="0" h="3427824">
                   <a:moveTo>
-                    <a:pt x="0" y="3364365"/>
+                    <a:pt x="0" y="3427824"/>
                   </a:moveTo>
                   <a:lnTo>
                     <a:pt x="0" y="0"/>
@@ -2486,15 +2486,15 @@
           </p:nvSpPr>
           <p:spPr>
             <a:xfrm>
-              <a:off x="3447406" y="2209169"/>
-              <a:ext cx="0" cy="3364365"/>
+              <a:off x="2137874" y="2185486"/>
+              <a:ext cx="0" cy="3427824"/>
             </a:xfrm>
             <a:custGeom>
               <a:avLst/>
               <a:pathLst>
-                <a:path w="0" h="3364365">
+                <a:path w="0" h="3427824">
                   <a:moveTo>
-                    <a:pt x="0" y="3364365"/>
+                    <a:pt x="0" y="3427824"/>
                   </a:moveTo>
                   <a:lnTo>
                     <a:pt x="0" y="0"/>
@@ -2529,15 +2529,15 @@
           </p:nvSpPr>
           <p:spPr>
             <a:xfrm>
-              <a:off x="5193449" y="2209169"/>
-              <a:ext cx="0" cy="3364365"/>
+              <a:off x="3010896" y="2185486"/>
+              <a:ext cx="0" cy="3427824"/>
             </a:xfrm>
             <a:custGeom>
               <a:avLst/>
               <a:pathLst>
-                <a:path w="0" h="3364365">
+                <a:path w="0" h="3427824">
                   <a:moveTo>
-                    <a:pt x="0" y="3364365"/>
+                    <a:pt x="0" y="3427824"/>
                   </a:moveTo>
                   <a:lnTo>
                     <a:pt x="0" y="0"/>
@@ -2572,15 +2572,15 @@
           </p:nvSpPr>
           <p:spPr>
             <a:xfrm>
-              <a:off x="6939491" y="2209169"/>
-              <a:ext cx="0" cy="3364365"/>
+              <a:off x="3883917" y="2185486"/>
+              <a:ext cx="0" cy="3427824"/>
             </a:xfrm>
             <a:custGeom>
               <a:avLst/>
               <a:pathLst>
-                <a:path w="0" h="3364365">
+                <a:path w="0" h="3427824">
                   <a:moveTo>
-                    <a:pt x="0" y="3364365"/>
+                    <a:pt x="0" y="3427824"/>
                   </a:moveTo>
                   <a:lnTo>
                     <a:pt x="0" y="0"/>
@@ -2615,26 +2615,26 @@
           </p:nvSpPr>
           <p:spPr>
             <a:xfrm>
-              <a:off x="915645" y="5420609"/>
-              <a:ext cx="7682587" cy="0"/>
+              <a:off x="4756938" y="2185486"/>
+              <a:ext cx="0" cy="3427824"/>
             </a:xfrm>
             <a:custGeom>
               <a:avLst/>
               <a:pathLst>
-                <a:path w="7682587" h="0">
+                <a:path w="0" h="3427824">
                   <a:moveTo>
+                    <a:pt x="0" y="3427824"/>
+                  </a:moveTo>
+                  <a:lnTo>
                     <a:pt x="0" y="0"/>
-                  </a:moveTo>
-                  <a:lnTo>
-                    <a:pt x="7682587" y="0"/>
-                  </a:lnTo>
-                  <a:lnTo>
-                    <a:pt x="7682587" y="0"/>
+                  </a:lnTo>
+                  <a:lnTo>
+                    <a:pt x="0" y="0"/>
                   </a:lnTo>
                 </a:path>
               </a:pathLst>
             </a:custGeom>
-            <a:ln w="17246" cap="flat">
+            <a:ln w="8623" cap="flat">
               <a:solidFill>
                 <a:srgbClr val="EBEBEB">
                   <a:alpha val="100000"/>
@@ -2658,26 +2658,26 @@
           </p:nvSpPr>
           <p:spPr>
             <a:xfrm>
-              <a:off x="915645" y="4655980"/>
-              <a:ext cx="7682587" cy="0"/>
+              <a:off x="5629959" y="2185486"/>
+              <a:ext cx="0" cy="3427824"/>
             </a:xfrm>
             <a:custGeom>
               <a:avLst/>
               <a:pathLst>
-                <a:path w="7682587" h="0">
+                <a:path w="0" h="3427824">
                   <a:moveTo>
+                    <a:pt x="0" y="3427824"/>
+                  </a:moveTo>
+                  <a:lnTo>
                     <a:pt x="0" y="0"/>
-                  </a:moveTo>
-                  <a:lnTo>
-                    <a:pt x="7682587" y="0"/>
-                  </a:lnTo>
-                  <a:lnTo>
-                    <a:pt x="7682587" y="0"/>
+                  </a:lnTo>
+                  <a:lnTo>
+                    <a:pt x="0" y="0"/>
                   </a:lnTo>
                 </a:path>
               </a:pathLst>
             </a:custGeom>
-            <a:ln w="17246" cap="flat">
+            <a:ln w="8623" cap="flat">
               <a:solidFill>
                 <a:srgbClr val="EBEBEB">
                   <a:alpha val="100000"/>
@@ -2701,26 +2701,26 @@
           </p:nvSpPr>
           <p:spPr>
             <a:xfrm>
-              <a:off x="915645" y="3891352"/>
-              <a:ext cx="7682587" cy="0"/>
+              <a:off x="6502981" y="2185486"/>
+              <a:ext cx="0" cy="3427824"/>
             </a:xfrm>
             <a:custGeom>
               <a:avLst/>
               <a:pathLst>
-                <a:path w="7682587" h="0">
+                <a:path w="0" h="3427824">
                   <a:moveTo>
+                    <a:pt x="0" y="3427824"/>
+                  </a:moveTo>
+                  <a:lnTo>
                     <a:pt x="0" y="0"/>
-                  </a:moveTo>
-                  <a:lnTo>
-                    <a:pt x="7682587" y="0"/>
-                  </a:lnTo>
-                  <a:lnTo>
-                    <a:pt x="7682587" y="0"/>
+                  </a:lnTo>
+                  <a:lnTo>
+                    <a:pt x="0" y="0"/>
                   </a:lnTo>
                 </a:path>
               </a:pathLst>
             </a:custGeom>
-            <a:ln w="17246" cap="flat">
+            <a:ln w="8623" cap="flat">
               <a:solidFill>
                 <a:srgbClr val="EBEBEB">
                   <a:alpha val="100000"/>
@@ -2744,26 +2744,26 @@
           </p:nvSpPr>
           <p:spPr>
             <a:xfrm>
-              <a:off x="915645" y="3126723"/>
-              <a:ext cx="7682587" cy="0"/>
+              <a:off x="7376002" y="2185486"/>
+              <a:ext cx="0" cy="3427824"/>
             </a:xfrm>
             <a:custGeom>
               <a:avLst/>
               <a:pathLst>
-                <a:path w="7682587" h="0">
+                <a:path w="0" h="3427824">
                   <a:moveTo>
+                    <a:pt x="0" y="3427824"/>
+                  </a:moveTo>
+                  <a:lnTo>
                     <a:pt x="0" y="0"/>
-                  </a:moveTo>
-                  <a:lnTo>
-                    <a:pt x="7682587" y="0"/>
-                  </a:lnTo>
-                  <a:lnTo>
-                    <a:pt x="7682587" y="0"/>
+                  </a:lnTo>
+                  <a:lnTo>
+                    <a:pt x="0" y="0"/>
                   </a:lnTo>
                 </a:path>
               </a:pathLst>
             </a:custGeom>
-            <a:ln w="17246" cap="flat">
+            <a:ln w="8623" cap="flat">
               <a:solidFill>
                 <a:srgbClr val="EBEBEB">
                   <a:alpha val="100000"/>
@@ -2787,26 +2787,26 @@
           </p:nvSpPr>
           <p:spPr>
             <a:xfrm>
-              <a:off x="915645" y="2362095"/>
-              <a:ext cx="7682587" cy="0"/>
+              <a:off x="8249023" y="2185486"/>
+              <a:ext cx="0" cy="3427824"/>
             </a:xfrm>
             <a:custGeom>
               <a:avLst/>
               <a:pathLst>
-                <a:path w="7682587" h="0">
+                <a:path w="0" h="3427824">
                   <a:moveTo>
+                    <a:pt x="0" y="3427824"/>
+                  </a:moveTo>
+                  <a:lnTo>
                     <a:pt x="0" y="0"/>
-                  </a:moveTo>
-                  <a:lnTo>
-                    <a:pt x="7682587" y="0"/>
-                  </a:lnTo>
-                  <a:lnTo>
-                    <a:pt x="7682587" y="0"/>
+                  </a:lnTo>
+                  <a:lnTo>
+                    <a:pt x="0" y="0"/>
                   </a:lnTo>
                 </a:path>
               </a:pathLst>
             </a:custGeom>
-            <a:ln w="17246" cap="flat">
+            <a:ln w="8623" cap="flat">
               <a:solidFill>
                 <a:srgbClr val="EBEBEB">
                   <a:alpha val="100000"/>
@@ -2830,21 +2830,21 @@
           </p:nvSpPr>
           <p:spPr>
             <a:xfrm>
-              <a:off x="2574385" y="2209169"/>
-              <a:ext cx="0" cy="3364365"/>
+              <a:off x="915645" y="5457500"/>
+              <a:ext cx="7682587" cy="0"/>
             </a:xfrm>
             <a:custGeom>
               <a:avLst/>
               <a:pathLst>
-                <a:path w="0" h="3364365">
+                <a:path w="7682587" h="0">
                   <a:moveTo>
-                    <a:pt x="0" y="3364365"/>
+                    <a:pt x="0" y="0"/>
                   </a:moveTo>
                   <a:lnTo>
-                    <a:pt x="0" y="0"/>
-                  </a:lnTo>
-                  <a:lnTo>
-                    <a:pt x="0" y="0"/>
+                    <a:pt x="7682587" y="0"/>
+                  </a:lnTo>
+                  <a:lnTo>
+                    <a:pt x="7682587" y="0"/>
                   </a:lnTo>
                 </a:path>
               </a:pathLst>
@@ -2873,21 +2873,21 @@
           </p:nvSpPr>
           <p:spPr>
             <a:xfrm>
-              <a:off x="4320427" y="2209169"/>
-              <a:ext cx="0" cy="3364365"/>
+              <a:off x="915645" y="4678449"/>
+              <a:ext cx="7682587" cy="0"/>
             </a:xfrm>
             <a:custGeom>
               <a:avLst/>
               <a:pathLst>
-                <a:path w="0" h="3364365">
+                <a:path w="7682587" h="0">
                   <a:moveTo>
-                    <a:pt x="0" y="3364365"/>
+                    <a:pt x="0" y="0"/>
                   </a:moveTo>
                   <a:lnTo>
-                    <a:pt x="0" y="0"/>
-                  </a:lnTo>
-                  <a:lnTo>
-                    <a:pt x="0" y="0"/>
+                    <a:pt x="7682587" y="0"/>
+                  </a:lnTo>
+                  <a:lnTo>
+                    <a:pt x="7682587" y="0"/>
                   </a:lnTo>
                 </a:path>
               </a:pathLst>
@@ -2916,21 +2916,21 @@
           </p:nvSpPr>
           <p:spPr>
             <a:xfrm>
-              <a:off x="6066470" y="2209169"/>
-              <a:ext cx="0" cy="3364365"/>
+              <a:off x="915645" y="3899398"/>
+              <a:ext cx="7682587" cy="0"/>
             </a:xfrm>
             <a:custGeom>
               <a:avLst/>
               <a:pathLst>
-                <a:path w="0" h="3364365">
+                <a:path w="7682587" h="0">
                   <a:moveTo>
-                    <a:pt x="0" y="3364365"/>
+                    <a:pt x="0" y="0"/>
                   </a:moveTo>
                   <a:lnTo>
-                    <a:pt x="0" y="0"/>
-                  </a:lnTo>
-                  <a:lnTo>
-                    <a:pt x="0" y="0"/>
+                    <a:pt x="7682587" y="0"/>
+                  </a:lnTo>
+                  <a:lnTo>
+                    <a:pt x="7682587" y="0"/>
                   </a:lnTo>
                 </a:path>
               </a:pathLst>
@@ -2959,21 +2959,21 @@
           </p:nvSpPr>
           <p:spPr>
             <a:xfrm>
-              <a:off x="7812512" y="2209169"/>
-              <a:ext cx="0" cy="3364365"/>
+              <a:off x="915645" y="3120347"/>
+              <a:ext cx="7682587" cy="0"/>
             </a:xfrm>
             <a:custGeom>
               <a:avLst/>
               <a:pathLst>
-                <a:path w="0" h="3364365">
+                <a:path w="7682587" h="0">
                   <a:moveTo>
-                    <a:pt x="0" y="3364365"/>
+                    <a:pt x="0" y="0"/>
                   </a:moveTo>
                   <a:lnTo>
-                    <a:pt x="0" y="0"/>
-                  </a:lnTo>
-                  <a:lnTo>
-                    <a:pt x="0" y="0"/>
+                    <a:pt x="7682587" y="0"/>
+                  </a:lnTo>
+                  <a:lnTo>
+                    <a:pt x="7682587" y="0"/>
                   </a:lnTo>
                 </a:path>
               </a:pathLst>
@@ -2996,594 +2996,981 @@
         </p:sp>
         <p:sp>
           <p:nvSpPr>
-            <p:cNvPr id="21" name="pg21"/>
+            <p:cNvPr id="21" name="pl21"/>
             <p:cNvSpPr/>
             <p:nvPr/>
           </p:nvSpPr>
           <p:spPr>
             <a:xfrm>
-              <a:off x="915645" y="2298429"/>
-              <a:ext cx="7260303" cy="2976153"/>
+              <a:off x="915645" y="2341296"/>
+              <a:ext cx="7682587" cy="0"/>
             </a:xfrm>
             <a:custGeom>
               <a:avLst/>
               <a:pathLst>
-                <a:path w="7260303" h="2976153">
+                <a:path w="7682587" h="0">
                   <a:moveTo>
                     <a:pt x="0" y="0"/>
                   </a:moveTo>
                   <a:lnTo>
-                    <a:pt x="72270" y="93823"/>
-                  </a:lnTo>
-                  <a:lnTo>
-                    <a:pt x="148739" y="189944"/>
-                  </a:lnTo>
-                  <a:lnTo>
-                    <a:pt x="225207" y="283015"/>
-                  </a:lnTo>
-                  <a:lnTo>
-                    <a:pt x="301676" y="373132"/>
-                  </a:lnTo>
-                  <a:lnTo>
-                    <a:pt x="378144" y="460388"/>
-                  </a:lnTo>
-                  <a:lnTo>
-                    <a:pt x="454613" y="544874"/>
-                  </a:lnTo>
-                  <a:lnTo>
-                    <a:pt x="531081" y="626679"/>
-                  </a:lnTo>
-                  <a:lnTo>
-                    <a:pt x="607549" y="705888"/>
-                  </a:lnTo>
-                  <a:lnTo>
-                    <a:pt x="684018" y="782582"/>
-                  </a:lnTo>
-                  <a:lnTo>
-                    <a:pt x="760486" y="856842"/>
-                  </a:lnTo>
-                  <a:lnTo>
-                    <a:pt x="836955" y="928745"/>
-                  </a:lnTo>
-                  <a:lnTo>
-                    <a:pt x="913423" y="998366"/>
-                  </a:lnTo>
-                  <a:lnTo>
-                    <a:pt x="989892" y="1065777"/>
-                  </a:lnTo>
-                  <a:lnTo>
-                    <a:pt x="1066360" y="1131048"/>
-                  </a:lnTo>
-                  <a:lnTo>
-                    <a:pt x="1142828" y="1194248"/>
-                  </a:lnTo>
-                  <a:lnTo>
-                    <a:pt x="1219297" y="1255441"/>
-                  </a:lnTo>
-                  <a:lnTo>
-                    <a:pt x="1295765" y="1314692"/>
-                  </a:lnTo>
-                  <a:lnTo>
-                    <a:pt x="1372234" y="1372063"/>
-                  </a:lnTo>
-                  <a:lnTo>
-                    <a:pt x="1448702" y="1427613"/>
-                  </a:lnTo>
-                  <a:lnTo>
-                    <a:pt x="1525171" y="1481399"/>
-                  </a:lnTo>
-                  <a:lnTo>
-                    <a:pt x="1601639" y="1533478"/>
-                  </a:lnTo>
-                  <a:lnTo>
-                    <a:pt x="1678107" y="1583904"/>
-                  </a:lnTo>
-                  <a:lnTo>
-                    <a:pt x="1754576" y="1632730"/>
-                  </a:lnTo>
-                  <a:lnTo>
-                    <a:pt x="1831044" y="1680006"/>
-                  </a:lnTo>
-                  <a:lnTo>
-                    <a:pt x="1907513" y="1725781"/>
-                  </a:lnTo>
-                  <a:lnTo>
-                    <a:pt x="1983981" y="1770104"/>
-                  </a:lnTo>
-                  <a:lnTo>
-                    <a:pt x="2060450" y="1813019"/>
-                  </a:lnTo>
-                  <a:lnTo>
-                    <a:pt x="2136918" y="1854573"/>
-                  </a:lnTo>
-                  <a:lnTo>
-                    <a:pt x="2213386" y="1894807"/>
-                  </a:lnTo>
-                  <a:lnTo>
-                    <a:pt x="2289855" y="1933765"/>
-                  </a:lnTo>
-                  <a:lnTo>
-                    <a:pt x="2366323" y="1971486"/>
-                  </a:lnTo>
-                  <a:lnTo>
-                    <a:pt x="2442792" y="2008009"/>
-                  </a:lnTo>
-                  <a:lnTo>
-                    <a:pt x="2519260" y="2043373"/>
-                  </a:lnTo>
-                  <a:lnTo>
-                    <a:pt x="2595729" y="2077615"/>
-                  </a:lnTo>
-                  <a:lnTo>
-                    <a:pt x="2672197" y="2110770"/>
-                  </a:lnTo>
-                  <a:lnTo>
-                    <a:pt x="2748666" y="2142873"/>
-                  </a:lnTo>
-                  <a:lnTo>
-                    <a:pt x="2825134" y="2173957"/>
-                  </a:lnTo>
-                  <a:lnTo>
-                    <a:pt x="2901602" y="2204054"/>
-                  </a:lnTo>
-                  <a:lnTo>
-                    <a:pt x="2978071" y="2233196"/>
-                  </a:lnTo>
-                  <a:lnTo>
-                    <a:pt x="3054539" y="2261412"/>
-                  </a:lnTo>
-                  <a:lnTo>
-                    <a:pt x="3131008" y="2288734"/>
-                  </a:lnTo>
-                  <a:lnTo>
-                    <a:pt x="3207476" y="2315188"/>
-                  </a:lnTo>
-                  <a:lnTo>
-                    <a:pt x="3283945" y="2340802"/>
-                  </a:lnTo>
-                  <a:lnTo>
-                    <a:pt x="3360413" y="2356268"/>
-                  </a:lnTo>
-                  <a:lnTo>
-                    <a:pt x="3436881" y="2352344"/>
-                  </a:lnTo>
-                  <a:lnTo>
-                    <a:pt x="3513350" y="2348401"/>
-                  </a:lnTo>
-                  <a:lnTo>
-                    <a:pt x="3589818" y="2344437"/>
-                  </a:lnTo>
-                  <a:lnTo>
-                    <a:pt x="3666287" y="2340453"/>
-                  </a:lnTo>
-                  <a:lnTo>
-                    <a:pt x="3742755" y="2336449"/>
-                  </a:lnTo>
-                  <a:lnTo>
-                    <a:pt x="3819224" y="2332424"/>
-                  </a:lnTo>
-                  <a:lnTo>
-                    <a:pt x="3895692" y="2328378"/>
-                  </a:lnTo>
-                  <a:lnTo>
-                    <a:pt x="3972160" y="2324312"/>
-                  </a:lnTo>
-                  <a:lnTo>
-                    <a:pt x="4048629" y="2320225"/>
-                  </a:lnTo>
-                  <a:lnTo>
-                    <a:pt x="4125097" y="2316117"/>
-                  </a:lnTo>
-                  <a:lnTo>
-                    <a:pt x="4201566" y="2311988"/>
-                  </a:lnTo>
-                  <a:lnTo>
-                    <a:pt x="4278034" y="2307837"/>
-                  </a:lnTo>
-                  <a:lnTo>
-                    <a:pt x="4354503" y="2303666"/>
-                  </a:lnTo>
-                  <a:lnTo>
-                    <a:pt x="4430971" y="2299473"/>
-                  </a:lnTo>
-                  <a:lnTo>
-                    <a:pt x="4507439" y="2295259"/>
-                  </a:lnTo>
-                  <a:lnTo>
-                    <a:pt x="4583908" y="2291023"/>
-                  </a:lnTo>
-                  <a:lnTo>
-                    <a:pt x="4660376" y="2286765"/>
-                  </a:lnTo>
-                  <a:lnTo>
-                    <a:pt x="4736845" y="2282486"/>
-                  </a:lnTo>
-                  <a:lnTo>
-                    <a:pt x="4813313" y="2278184"/>
-                  </a:lnTo>
-                  <a:lnTo>
-                    <a:pt x="4889782" y="2273861"/>
-                  </a:lnTo>
-                  <a:lnTo>
-                    <a:pt x="4966250" y="2269516"/>
-                  </a:lnTo>
-                  <a:lnTo>
-                    <a:pt x="5042719" y="2265148"/>
-                  </a:lnTo>
-                  <a:lnTo>
-                    <a:pt x="5119187" y="2260758"/>
-                  </a:lnTo>
-                  <a:lnTo>
-                    <a:pt x="5195655" y="2256345"/>
-                  </a:lnTo>
-                  <a:lnTo>
-                    <a:pt x="5272124" y="2251910"/>
-                  </a:lnTo>
-                  <a:lnTo>
-                    <a:pt x="5348592" y="2247452"/>
-                  </a:lnTo>
-                  <a:lnTo>
-                    <a:pt x="5425061" y="2242971"/>
-                  </a:lnTo>
-                  <a:lnTo>
-                    <a:pt x="5501529" y="2238467"/>
-                  </a:lnTo>
-                  <a:lnTo>
-                    <a:pt x="5577998" y="2233940"/>
-                  </a:lnTo>
-                  <a:lnTo>
-                    <a:pt x="5654466" y="2229390"/>
-                  </a:lnTo>
-                  <a:lnTo>
-                    <a:pt x="5730934" y="2224817"/>
-                  </a:lnTo>
-                  <a:lnTo>
-                    <a:pt x="5807403" y="2220220"/>
-                  </a:lnTo>
-                  <a:lnTo>
-                    <a:pt x="5883871" y="2215600"/>
-                  </a:lnTo>
-                  <a:lnTo>
-                    <a:pt x="5960340" y="2210956"/>
-                  </a:lnTo>
-                  <a:lnTo>
-                    <a:pt x="6036808" y="2206288"/>
-                  </a:lnTo>
-                  <a:lnTo>
-                    <a:pt x="6113277" y="2201596"/>
-                  </a:lnTo>
-                  <a:lnTo>
-                    <a:pt x="6189745" y="2196881"/>
-                  </a:lnTo>
-                  <a:lnTo>
-                    <a:pt x="6266213" y="2192141"/>
-                  </a:lnTo>
-                  <a:lnTo>
-                    <a:pt x="6342682" y="2187377"/>
-                  </a:lnTo>
-                  <a:lnTo>
-                    <a:pt x="6419150" y="2182588"/>
-                  </a:lnTo>
-                  <a:lnTo>
-                    <a:pt x="6495619" y="2177775"/>
-                  </a:lnTo>
-                  <a:lnTo>
-                    <a:pt x="6572087" y="2172937"/>
-                  </a:lnTo>
-                  <a:lnTo>
-                    <a:pt x="6648556" y="2168075"/>
-                  </a:lnTo>
-                  <a:lnTo>
-                    <a:pt x="6725024" y="2163188"/>
-                  </a:lnTo>
-                  <a:lnTo>
-                    <a:pt x="6801492" y="2158275"/>
-                  </a:lnTo>
-                  <a:lnTo>
-                    <a:pt x="6877961" y="2153337"/>
-                  </a:lnTo>
-                  <a:lnTo>
-                    <a:pt x="6954429" y="2148375"/>
-                  </a:lnTo>
-                  <a:lnTo>
-                    <a:pt x="7030898" y="2143386"/>
-                  </a:lnTo>
-                  <a:lnTo>
-                    <a:pt x="7107366" y="2138372"/>
-                  </a:lnTo>
-                  <a:lnTo>
-                    <a:pt x="7183835" y="2133333"/>
-                  </a:lnTo>
-                  <a:lnTo>
-                    <a:pt x="7260303" y="2128267"/>
-                  </a:lnTo>
-                  <a:lnTo>
-                    <a:pt x="7260303" y="2976153"/>
-                  </a:lnTo>
-                  <a:lnTo>
-                    <a:pt x="7183835" y="2971366"/>
-                  </a:lnTo>
-                  <a:lnTo>
-                    <a:pt x="7107366" y="2966422"/>
-                  </a:lnTo>
-                  <a:lnTo>
-                    <a:pt x="7030898" y="2961316"/>
-                  </a:lnTo>
-                  <a:lnTo>
-                    <a:pt x="6954429" y="2956043"/>
-                  </a:lnTo>
-                  <a:lnTo>
-                    <a:pt x="6877961" y="2950597"/>
-                  </a:lnTo>
-                  <a:lnTo>
-                    <a:pt x="6801492" y="2944972"/>
-                  </a:lnTo>
-                  <a:lnTo>
-                    <a:pt x="6725024" y="2939163"/>
-                  </a:lnTo>
-                  <a:lnTo>
-                    <a:pt x="6648556" y="2933164"/>
-                  </a:lnTo>
-                  <a:lnTo>
-                    <a:pt x="6572087" y="2926967"/>
-                  </a:lnTo>
-                  <a:lnTo>
-                    <a:pt x="6495619" y="2920568"/>
-                  </a:lnTo>
-                  <a:lnTo>
-                    <a:pt x="6419150" y="2913959"/>
-                  </a:lnTo>
-                  <a:lnTo>
-                    <a:pt x="6342682" y="2907133"/>
-                  </a:lnTo>
-                  <a:lnTo>
-                    <a:pt x="6266213" y="2900084"/>
-                  </a:lnTo>
-                  <a:lnTo>
-                    <a:pt x="6189745" y="2892804"/>
-                  </a:lnTo>
-                  <a:lnTo>
-                    <a:pt x="6113277" y="2885284"/>
-                  </a:lnTo>
-                  <a:lnTo>
-                    <a:pt x="6036808" y="2877519"/>
-                  </a:lnTo>
-                  <a:lnTo>
-                    <a:pt x="5960340" y="2869498"/>
-                  </a:lnTo>
-                  <a:lnTo>
-                    <a:pt x="5883871" y="2861215"/>
-                  </a:lnTo>
-                  <a:lnTo>
-                    <a:pt x="5807403" y="2852661"/>
-                  </a:lnTo>
-                  <a:lnTo>
-                    <a:pt x="5730934" y="2843826"/>
-                  </a:lnTo>
-                  <a:lnTo>
-                    <a:pt x="5654466" y="2834701"/>
-                  </a:lnTo>
-                  <a:lnTo>
-                    <a:pt x="5577998" y="2825277"/>
-                  </a:lnTo>
-                  <a:lnTo>
-                    <a:pt x="5501529" y="2815544"/>
-                  </a:lnTo>
-                  <a:lnTo>
-                    <a:pt x="5425061" y="2805492"/>
-                  </a:lnTo>
-                  <a:lnTo>
-                    <a:pt x="5348592" y="2795111"/>
-                  </a:lnTo>
-                  <a:lnTo>
-                    <a:pt x="5272124" y="2784390"/>
-                  </a:lnTo>
-                  <a:lnTo>
-                    <a:pt x="5195655" y="2773316"/>
-                  </a:lnTo>
-                  <a:lnTo>
-                    <a:pt x="5119187" y="2761880"/>
-                  </a:lnTo>
-                  <a:lnTo>
-                    <a:pt x="5042719" y="2750069"/>
-                  </a:lnTo>
-                  <a:lnTo>
-                    <a:pt x="4966250" y="2737871"/>
-                  </a:lnTo>
-                  <a:lnTo>
-                    <a:pt x="4889782" y="2725273"/>
-                  </a:lnTo>
-                  <a:lnTo>
-                    <a:pt x="4813313" y="2712262"/>
-                  </a:lnTo>
-                  <a:lnTo>
-                    <a:pt x="4736845" y="2698825"/>
-                  </a:lnTo>
-                  <a:lnTo>
-                    <a:pt x="4660376" y="2684947"/>
-                  </a:lnTo>
-                  <a:lnTo>
-                    <a:pt x="4583908" y="2670614"/>
-                  </a:lnTo>
-                  <a:lnTo>
-                    <a:pt x="4507439" y="2655811"/>
-                  </a:lnTo>
-                  <a:lnTo>
-                    <a:pt x="4430971" y="2640523"/>
-                  </a:lnTo>
-                  <a:lnTo>
-                    <a:pt x="4354503" y="2624734"/>
-                  </a:lnTo>
-                  <a:lnTo>
-                    <a:pt x="4278034" y="2608427"/>
-                  </a:lnTo>
-                  <a:lnTo>
-                    <a:pt x="4201566" y="2591586"/>
-                  </a:lnTo>
-                  <a:lnTo>
-                    <a:pt x="4125097" y="2574192"/>
-                  </a:lnTo>
-                  <a:lnTo>
-                    <a:pt x="4048629" y="2556229"/>
-                  </a:lnTo>
-                  <a:lnTo>
-                    <a:pt x="3972160" y="2537676"/>
-                  </a:lnTo>
-                  <a:lnTo>
-                    <a:pt x="3895692" y="2518516"/>
-                  </a:lnTo>
-                  <a:lnTo>
-                    <a:pt x="3819224" y="2498727"/>
-                  </a:lnTo>
-                  <a:lnTo>
-                    <a:pt x="3742755" y="2478290"/>
-                  </a:lnTo>
-                  <a:lnTo>
-                    <a:pt x="3666287" y="2457182"/>
-                  </a:lnTo>
-                  <a:lnTo>
-                    <a:pt x="3589818" y="2435383"/>
-                  </a:lnTo>
-                  <a:lnTo>
-                    <a:pt x="3513350" y="2412869"/>
-                  </a:lnTo>
-                  <a:lnTo>
-                    <a:pt x="3436881" y="2389617"/>
-                  </a:lnTo>
-                  <a:lnTo>
-                    <a:pt x="3360413" y="2365603"/>
-                  </a:lnTo>
-                  <a:lnTo>
-                    <a:pt x="3283945" y="2360171"/>
-                  </a:lnTo>
-                  <a:lnTo>
-                    <a:pt x="3207476" y="2364054"/>
-                  </a:lnTo>
-                  <a:lnTo>
-                    <a:pt x="3131008" y="2367918"/>
-                  </a:lnTo>
-                  <a:lnTo>
-                    <a:pt x="3054539" y="2371762"/>
-                  </a:lnTo>
-                  <a:lnTo>
-                    <a:pt x="2978071" y="2375587"/>
-                  </a:lnTo>
-                  <a:lnTo>
-                    <a:pt x="2901602" y="2379392"/>
-                  </a:lnTo>
-                  <a:lnTo>
-                    <a:pt x="2825134" y="2383177"/>
-                  </a:lnTo>
-                  <a:lnTo>
-                    <a:pt x="2748666" y="2386943"/>
-                  </a:lnTo>
-                  <a:lnTo>
-                    <a:pt x="2672197" y="2390690"/>
-                  </a:lnTo>
-                  <a:lnTo>
-                    <a:pt x="2595729" y="2394418"/>
-                  </a:lnTo>
-                  <a:lnTo>
-                    <a:pt x="2519260" y="2398127"/>
-                  </a:lnTo>
-                  <a:lnTo>
-                    <a:pt x="2442792" y="2401817"/>
-                  </a:lnTo>
-                  <a:lnTo>
-                    <a:pt x="2366323" y="2405489"/>
-                  </a:lnTo>
-                  <a:lnTo>
-                    <a:pt x="2289855" y="2409141"/>
-                  </a:lnTo>
-                  <a:lnTo>
-                    <a:pt x="2213386" y="2412775"/>
-                  </a:lnTo>
-                  <a:lnTo>
-                    <a:pt x="2136918" y="2416391"/>
-                  </a:lnTo>
-                  <a:lnTo>
-                    <a:pt x="2060450" y="2419988"/>
-                  </a:lnTo>
-                  <a:lnTo>
-                    <a:pt x="1983981" y="2423566"/>
-                  </a:lnTo>
-                  <a:lnTo>
-                    <a:pt x="1907513" y="2427127"/>
-                  </a:lnTo>
-                  <a:lnTo>
-                    <a:pt x="1831044" y="2430669"/>
-                  </a:lnTo>
-                  <a:lnTo>
-                    <a:pt x="1754576" y="2434193"/>
-                  </a:lnTo>
-                  <a:lnTo>
-                    <a:pt x="1678107" y="2437699"/>
-                  </a:lnTo>
-                  <a:lnTo>
-                    <a:pt x="1601639" y="2441188"/>
-                  </a:lnTo>
-                  <a:lnTo>
-                    <a:pt x="1525171" y="2444658"/>
-                  </a:lnTo>
-                  <a:lnTo>
-                    <a:pt x="1448702" y="2448111"/>
-                  </a:lnTo>
-                  <a:lnTo>
-                    <a:pt x="1372234" y="2451547"/>
-                  </a:lnTo>
-                  <a:lnTo>
-                    <a:pt x="1295765" y="2454965"/>
-                  </a:lnTo>
-                  <a:lnTo>
-                    <a:pt x="1219297" y="2458365"/>
-                  </a:lnTo>
-                  <a:lnTo>
-                    <a:pt x="1142828" y="2461748"/>
-                  </a:lnTo>
-                  <a:lnTo>
-                    <a:pt x="1066360" y="2465114"/>
-                  </a:lnTo>
-                  <a:lnTo>
-                    <a:pt x="989892" y="2468463"/>
-                  </a:lnTo>
-                  <a:lnTo>
-                    <a:pt x="913423" y="2471794"/>
-                  </a:lnTo>
-                  <a:lnTo>
-                    <a:pt x="836955" y="2475109"/>
-                  </a:lnTo>
-                  <a:lnTo>
-                    <a:pt x="760486" y="2478407"/>
-                  </a:lnTo>
-                  <a:lnTo>
-                    <a:pt x="684018" y="2481687"/>
-                  </a:lnTo>
-                  <a:lnTo>
-                    <a:pt x="607549" y="2484952"/>
-                  </a:lnTo>
-                  <a:lnTo>
-                    <a:pt x="531081" y="2488199"/>
-                  </a:lnTo>
-                  <a:lnTo>
-                    <a:pt x="454613" y="2491430"/>
-                  </a:lnTo>
-                  <a:lnTo>
-                    <a:pt x="378144" y="2494645"/>
-                  </a:lnTo>
-                  <a:lnTo>
-                    <a:pt x="301676" y="2497843"/>
-                  </a:lnTo>
-                  <a:lnTo>
-                    <a:pt x="225207" y="2501025"/>
-                  </a:lnTo>
-                  <a:lnTo>
-                    <a:pt x="148739" y="2504191"/>
-                  </a:lnTo>
-                  <a:lnTo>
-                    <a:pt x="72270" y="2507340"/>
-                  </a:lnTo>
-                  <a:lnTo>
-                    <a:pt x="0" y="2510302"/>
+                    <a:pt x="7682587" y="0"/>
+                  </a:lnTo>
+                  <a:lnTo>
+                    <a:pt x="7682587" y="0"/>
+                  </a:lnTo>
+                </a:path>
+              </a:pathLst>
+            </a:custGeom>
+            <a:ln w="17246" cap="flat">
+              <a:solidFill>
+                <a:srgbClr val="EBEBEB">
+                  <a:alpha val="100000"/>
+                </a:srgbClr>
+              </a:solidFill>
+              <a:prstDash val="solid"/>
+              <a:round/>
+            </a:ln>
+          </p:spPr>
+          <p:txBody>
+            <a:bodyPr/>
+            <a:lstStyle/>
+            <a:p/>
+          </p:txBody>
+        </p:sp>
+        <p:sp>
+          <p:nvSpPr>
+            <p:cNvPr id="22" name="pl22"/>
+            <p:cNvSpPr/>
+            <p:nvPr/>
+          </p:nvSpPr>
+          <p:spPr>
+            <a:xfrm>
+              <a:off x="1701364" y="2185486"/>
+              <a:ext cx="0" cy="3427824"/>
+            </a:xfrm>
+            <a:custGeom>
+              <a:avLst/>
+              <a:pathLst>
+                <a:path w="0" h="3427824">
+                  <a:moveTo>
+                    <a:pt x="0" y="3427824"/>
+                  </a:moveTo>
+                  <a:lnTo>
+                    <a:pt x="0" y="0"/>
+                  </a:lnTo>
+                  <a:lnTo>
+                    <a:pt x="0" y="0"/>
+                  </a:lnTo>
+                </a:path>
+              </a:pathLst>
+            </a:custGeom>
+            <a:ln w="17246" cap="flat">
+              <a:solidFill>
+                <a:srgbClr val="EBEBEB">
+                  <a:alpha val="100000"/>
+                </a:srgbClr>
+              </a:solidFill>
+              <a:prstDash val="solid"/>
+              <a:round/>
+            </a:ln>
+          </p:spPr>
+          <p:txBody>
+            <a:bodyPr/>
+            <a:lstStyle/>
+            <a:p/>
+          </p:txBody>
+        </p:sp>
+        <p:sp>
+          <p:nvSpPr>
+            <p:cNvPr id="23" name="pl23"/>
+            <p:cNvSpPr/>
+            <p:nvPr/>
+          </p:nvSpPr>
+          <p:spPr>
+            <a:xfrm>
+              <a:off x="2574385" y="2185486"/>
+              <a:ext cx="0" cy="3427824"/>
+            </a:xfrm>
+            <a:custGeom>
+              <a:avLst/>
+              <a:pathLst>
+                <a:path w="0" h="3427824">
+                  <a:moveTo>
+                    <a:pt x="0" y="3427824"/>
+                  </a:moveTo>
+                  <a:lnTo>
+                    <a:pt x="0" y="0"/>
+                  </a:lnTo>
+                  <a:lnTo>
+                    <a:pt x="0" y="0"/>
+                  </a:lnTo>
+                </a:path>
+              </a:pathLst>
+            </a:custGeom>
+            <a:ln w="17246" cap="flat">
+              <a:solidFill>
+                <a:srgbClr val="EBEBEB">
+                  <a:alpha val="100000"/>
+                </a:srgbClr>
+              </a:solidFill>
+              <a:prstDash val="solid"/>
+              <a:round/>
+            </a:ln>
+          </p:spPr>
+          <p:txBody>
+            <a:bodyPr/>
+            <a:lstStyle/>
+            <a:p/>
+          </p:txBody>
+        </p:sp>
+        <p:sp>
+          <p:nvSpPr>
+            <p:cNvPr id="24" name="pl24"/>
+            <p:cNvSpPr/>
+            <p:nvPr/>
+          </p:nvSpPr>
+          <p:spPr>
+            <a:xfrm>
+              <a:off x="3447406" y="2185486"/>
+              <a:ext cx="0" cy="3427824"/>
+            </a:xfrm>
+            <a:custGeom>
+              <a:avLst/>
+              <a:pathLst>
+                <a:path w="0" h="3427824">
+                  <a:moveTo>
+                    <a:pt x="0" y="3427824"/>
+                  </a:moveTo>
+                  <a:lnTo>
+                    <a:pt x="0" y="0"/>
+                  </a:lnTo>
+                  <a:lnTo>
+                    <a:pt x="0" y="0"/>
+                  </a:lnTo>
+                </a:path>
+              </a:pathLst>
+            </a:custGeom>
+            <a:ln w="17246" cap="flat">
+              <a:solidFill>
+                <a:srgbClr val="EBEBEB">
+                  <a:alpha val="100000"/>
+                </a:srgbClr>
+              </a:solidFill>
+              <a:prstDash val="solid"/>
+              <a:round/>
+            </a:ln>
+          </p:spPr>
+          <p:txBody>
+            <a:bodyPr/>
+            <a:lstStyle/>
+            <a:p/>
+          </p:txBody>
+        </p:sp>
+        <p:sp>
+          <p:nvSpPr>
+            <p:cNvPr id="25" name="pl25"/>
+            <p:cNvSpPr/>
+            <p:nvPr/>
+          </p:nvSpPr>
+          <p:spPr>
+            <a:xfrm>
+              <a:off x="4320427" y="2185486"/>
+              <a:ext cx="0" cy="3427824"/>
+            </a:xfrm>
+            <a:custGeom>
+              <a:avLst/>
+              <a:pathLst>
+                <a:path w="0" h="3427824">
+                  <a:moveTo>
+                    <a:pt x="0" y="3427824"/>
+                  </a:moveTo>
+                  <a:lnTo>
+                    <a:pt x="0" y="0"/>
+                  </a:lnTo>
+                  <a:lnTo>
+                    <a:pt x="0" y="0"/>
+                  </a:lnTo>
+                </a:path>
+              </a:pathLst>
+            </a:custGeom>
+            <a:ln w="17246" cap="flat">
+              <a:solidFill>
+                <a:srgbClr val="EBEBEB">
+                  <a:alpha val="100000"/>
+                </a:srgbClr>
+              </a:solidFill>
+              <a:prstDash val="solid"/>
+              <a:round/>
+            </a:ln>
+          </p:spPr>
+          <p:txBody>
+            <a:bodyPr/>
+            <a:lstStyle/>
+            <a:p/>
+          </p:txBody>
+        </p:sp>
+        <p:sp>
+          <p:nvSpPr>
+            <p:cNvPr id="26" name="pl26"/>
+            <p:cNvSpPr/>
+            <p:nvPr/>
+          </p:nvSpPr>
+          <p:spPr>
+            <a:xfrm>
+              <a:off x="5193449" y="2185486"/>
+              <a:ext cx="0" cy="3427824"/>
+            </a:xfrm>
+            <a:custGeom>
+              <a:avLst/>
+              <a:pathLst>
+                <a:path w="0" h="3427824">
+                  <a:moveTo>
+                    <a:pt x="0" y="3427824"/>
+                  </a:moveTo>
+                  <a:lnTo>
+                    <a:pt x="0" y="0"/>
+                  </a:lnTo>
+                  <a:lnTo>
+                    <a:pt x="0" y="0"/>
+                  </a:lnTo>
+                </a:path>
+              </a:pathLst>
+            </a:custGeom>
+            <a:ln w="17246" cap="flat">
+              <a:solidFill>
+                <a:srgbClr val="EBEBEB">
+                  <a:alpha val="100000"/>
+                </a:srgbClr>
+              </a:solidFill>
+              <a:prstDash val="solid"/>
+              <a:round/>
+            </a:ln>
+          </p:spPr>
+          <p:txBody>
+            <a:bodyPr/>
+            <a:lstStyle/>
+            <a:p/>
+          </p:txBody>
+        </p:sp>
+        <p:sp>
+          <p:nvSpPr>
+            <p:cNvPr id="27" name="pl27"/>
+            <p:cNvSpPr/>
+            <p:nvPr/>
+          </p:nvSpPr>
+          <p:spPr>
+            <a:xfrm>
+              <a:off x="6066470" y="2185486"/>
+              <a:ext cx="0" cy="3427824"/>
+            </a:xfrm>
+            <a:custGeom>
+              <a:avLst/>
+              <a:pathLst>
+                <a:path w="0" h="3427824">
+                  <a:moveTo>
+                    <a:pt x="0" y="3427824"/>
+                  </a:moveTo>
+                  <a:lnTo>
+                    <a:pt x="0" y="0"/>
+                  </a:lnTo>
+                  <a:lnTo>
+                    <a:pt x="0" y="0"/>
+                  </a:lnTo>
+                </a:path>
+              </a:pathLst>
+            </a:custGeom>
+            <a:ln w="17246" cap="flat">
+              <a:solidFill>
+                <a:srgbClr val="EBEBEB">
+                  <a:alpha val="100000"/>
+                </a:srgbClr>
+              </a:solidFill>
+              <a:prstDash val="solid"/>
+              <a:round/>
+            </a:ln>
+          </p:spPr>
+          <p:txBody>
+            <a:bodyPr/>
+            <a:lstStyle/>
+            <a:p/>
+          </p:txBody>
+        </p:sp>
+        <p:sp>
+          <p:nvSpPr>
+            <p:cNvPr id="28" name="pl28"/>
+            <p:cNvSpPr/>
+            <p:nvPr/>
+          </p:nvSpPr>
+          <p:spPr>
+            <a:xfrm>
+              <a:off x="6939491" y="2185486"/>
+              <a:ext cx="0" cy="3427824"/>
+            </a:xfrm>
+            <a:custGeom>
+              <a:avLst/>
+              <a:pathLst>
+                <a:path w="0" h="3427824">
+                  <a:moveTo>
+                    <a:pt x="0" y="3427824"/>
+                  </a:moveTo>
+                  <a:lnTo>
+                    <a:pt x="0" y="0"/>
+                  </a:lnTo>
+                  <a:lnTo>
+                    <a:pt x="0" y="0"/>
+                  </a:lnTo>
+                </a:path>
+              </a:pathLst>
+            </a:custGeom>
+            <a:ln w="17246" cap="flat">
+              <a:solidFill>
+                <a:srgbClr val="EBEBEB">
+                  <a:alpha val="100000"/>
+                </a:srgbClr>
+              </a:solidFill>
+              <a:prstDash val="solid"/>
+              <a:round/>
+            </a:ln>
+          </p:spPr>
+          <p:txBody>
+            <a:bodyPr/>
+            <a:lstStyle/>
+            <a:p/>
+          </p:txBody>
+        </p:sp>
+        <p:sp>
+          <p:nvSpPr>
+            <p:cNvPr id="29" name="pl29"/>
+            <p:cNvSpPr/>
+            <p:nvPr/>
+          </p:nvSpPr>
+          <p:spPr>
+            <a:xfrm>
+              <a:off x="7812512" y="2185486"/>
+              <a:ext cx="0" cy="3427824"/>
+            </a:xfrm>
+            <a:custGeom>
+              <a:avLst/>
+              <a:pathLst>
+                <a:path w="0" h="3427824">
+                  <a:moveTo>
+                    <a:pt x="0" y="3427824"/>
+                  </a:moveTo>
+                  <a:lnTo>
+                    <a:pt x="0" y="0"/>
+                  </a:lnTo>
+                  <a:lnTo>
+                    <a:pt x="0" y="0"/>
+                  </a:lnTo>
+                </a:path>
+              </a:pathLst>
+            </a:custGeom>
+            <a:ln w="17246" cap="flat">
+              <a:solidFill>
+                <a:srgbClr val="EBEBEB">
+                  <a:alpha val="100000"/>
+                </a:srgbClr>
+              </a:solidFill>
+              <a:prstDash val="solid"/>
+              <a:round/>
+            </a:ln>
+          </p:spPr>
+          <p:txBody>
+            <a:bodyPr/>
+            <a:lstStyle/>
+            <a:p/>
+          </p:txBody>
+        </p:sp>
+        <p:sp>
+          <p:nvSpPr>
+            <p:cNvPr id="30" name="pg30"/>
+            <p:cNvSpPr/>
+            <p:nvPr/>
+          </p:nvSpPr>
+          <p:spPr>
+            <a:xfrm>
+              <a:off x="915645" y="2276429"/>
+              <a:ext cx="7260303" cy="3032290"/>
+            </a:xfrm>
+            <a:custGeom>
+              <a:avLst/>
+              <a:pathLst>
+                <a:path w="7260303" h="3032290">
+                  <a:moveTo>
+                    <a:pt x="0" y="0"/>
+                  </a:moveTo>
+                  <a:lnTo>
+                    <a:pt x="72270" y="95592"/>
+                  </a:lnTo>
+                  <a:lnTo>
+                    <a:pt x="148739" y="193527"/>
+                  </a:lnTo>
+                  <a:lnTo>
+                    <a:pt x="225207" y="288353"/>
+                  </a:lnTo>
+                  <a:lnTo>
+                    <a:pt x="301676" y="380170"/>
+                  </a:lnTo>
+                  <a:lnTo>
+                    <a:pt x="378144" y="469072"/>
+                  </a:lnTo>
+                  <a:lnTo>
+                    <a:pt x="454613" y="555152"/>
+                  </a:lnTo>
+                  <a:lnTo>
+                    <a:pt x="531081" y="638500"/>
+                  </a:lnTo>
+                  <a:lnTo>
+                    <a:pt x="607549" y="719202"/>
+                  </a:lnTo>
+                  <a:lnTo>
+                    <a:pt x="684018" y="797343"/>
+                  </a:lnTo>
+                  <a:lnTo>
+                    <a:pt x="760486" y="873004"/>
+                  </a:lnTo>
+                  <a:lnTo>
+                    <a:pt x="836955" y="946263"/>
+                  </a:lnTo>
+                  <a:lnTo>
+                    <a:pt x="913423" y="1017197"/>
+                  </a:lnTo>
+                  <a:lnTo>
+                    <a:pt x="989892" y="1085880"/>
+                  </a:lnTo>
+                  <a:lnTo>
+                    <a:pt x="1066360" y="1152382"/>
+                  </a:lnTo>
+                  <a:lnTo>
+                    <a:pt x="1142828" y="1216774"/>
+                  </a:lnTo>
+                  <a:lnTo>
+                    <a:pt x="1219297" y="1279122"/>
+                  </a:lnTo>
+                  <a:lnTo>
+                    <a:pt x="1295765" y="1339490"/>
+                  </a:lnTo>
+                  <a:lnTo>
+                    <a:pt x="1372234" y="1397943"/>
+                  </a:lnTo>
+                  <a:lnTo>
+                    <a:pt x="1448702" y="1454541"/>
+                  </a:lnTo>
+                  <a:lnTo>
+                    <a:pt x="1525171" y="1509342"/>
+                  </a:lnTo>
+                  <a:lnTo>
+                    <a:pt x="1601639" y="1562403"/>
+                  </a:lnTo>
+                  <a:lnTo>
+                    <a:pt x="1678107" y="1613780"/>
+                  </a:lnTo>
+                  <a:lnTo>
+                    <a:pt x="1754576" y="1663527"/>
+                  </a:lnTo>
+                  <a:lnTo>
+                    <a:pt x="1831044" y="1711695"/>
+                  </a:lnTo>
+                  <a:lnTo>
+                    <a:pt x="1907513" y="1758333"/>
+                  </a:lnTo>
+                  <a:lnTo>
+                    <a:pt x="1983981" y="1803492"/>
+                  </a:lnTo>
+                  <a:lnTo>
+                    <a:pt x="2060450" y="1847217"/>
+                  </a:lnTo>
+                  <a:lnTo>
+                    <a:pt x="2136918" y="1889554"/>
+                  </a:lnTo>
+                  <a:lnTo>
+                    <a:pt x="2213386" y="1930547"/>
+                  </a:lnTo>
+                  <a:lnTo>
+                    <a:pt x="2289855" y="1970240"/>
+                  </a:lnTo>
+                  <a:lnTo>
+                    <a:pt x="2366323" y="2008672"/>
+                  </a:lnTo>
+                  <a:lnTo>
+                    <a:pt x="2442792" y="2045885"/>
+                  </a:lnTo>
+                  <a:lnTo>
+                    <a:pt x="2519260" y="2081916"/>
+                  </a:lnTo>
+                  <a:lnTo>
+                    <a:pt x="2595729" y="2116804"/>
+                  </a:lnTo>
+                  <a:lnTo>
+                    <a:pt x="2672197" y="2150584"/>
+                  </a:lnTo>
+                  <a:lnTo>
+                    <a:pt x="2748666" y="2183292"/>
+                  </a:lnTo>
+                  <a:lnTo>
+                    <a:pt x="2825134" y="2214962"/>
+                  </a:lnTo>
+                  <a:lnTo>
+                    <a:pt x="2901602" y="2245627"/>
+                  </a:lnTo>
+                  <a:lnTo>
+                    <a:pt x="2978071" y="2275319"/>
+                  </a:lnTo>
+                  <a:lnTo>
+                    <a:pt x="3054539" y="2304068"/>
+                  </a:lnTo>
+                  <a:lnTo>
+                    <a:pt x="3131008" y="2331904"/>
+                  </a:lnTo>
+                  <a:lnTo>
+                    <a:pt x="3207476" y="2358857"/>
+                  </a:lnTo>
+                  <a:lnTo>
+                    <a:pt x="3283945" y="2384955"/>
+                  </a:lnTo>
+                  <a:lnTo>
+                    <a:pt x="3360413" y="2400712"/>
+                  </a:lnTo>
+                  <a:lnTo>
+                    <a:pt x="3436881" y="2396715"/>
+                  </a:lnTo>
+                  <a:lnTo>
+                    <a:pt x="3513350" y="2392697"/>
+                  </a:lnTo>
+                  <a:lnTo>
+                    <a:pt x="3589818" y="2388658"/>
+                  </a:lnTo>
+                  <a:lnTo>
+                    <a:pt x="3666287" y="2384599"/>
+                  </a:lnTo>
+                  <a:lnTo>
+                    <a:pt x="3742755" y="2380519"/>
+                  </a:lnTo>
+                  <a:lnTo>
+                    <a:pt x="3819224" y="2376418"/>
+                  </a:lnTo>
+                  <a:lnTo>
+                    <a:pt x="3895692" y="2372296"/>
+                  </a:lnTo>
+                  <a:lnTo>
+                    <a:pt x="3972160" y="2368153"/>
+                  </a:lnTo>
+                  <a:lnTo>
+                    <a:pt x="4048629" y="2363989"/>
+                  </a:lnTo>
+                  <a:lnTo>
+                    <a:pt x="4125097" y="2359804"/>
+                  </a:lnTo>
+                  <a:lnTo>
+                    <a:pt x="4201566" y="2355597"/>
+                  </a:lnTo>
+                  <a:lnTo>
+                    <a:pt x="4278034" y="2351368"/>
+                  </a:lnTo>
+                  <a:lnTo>
+                    <a:pt x="4354503" y="2347118"/>
+                  </a:lnTo>
+                  <a:lnTo>
+                    <a:pt x="4430971" y="2342846"/>
+                  </a:lnTo>
+                  <a:lnTo>
+                    <a:pt x="4507439" y="2338552"/>
+                  </a:lnTo>
+                  <a:lnTo>
+                    <a:pt x="4583908" y="2334237"/>
+                  </a:lnTo>
+                  <a:lnTo>
+                    <a:pt x="4660376" y="2329899"/>
+                  </a:lnTo>
+                  <a:lnTo>
+                    <a:pt x="4736845" y="2325539"/>
+                  </a:lnTo>
+                  <a:lnTo>
+                    <a:pt x="4813313" y="2321156"/>
+                  </a:lnTo>
+                  <a:lnTo>
+                    <a:pt x="4889782" y="2316751"/>
+                  </a:lnTo>
+                  <a:lnTo>
+                    <a:pt x="4966250" y="2312324"/>
+                  </a:lnTo>
+                  <a:lnTo>
+                    <a:pt x="5042719" y="2307873"/>
+                  </a:lnTo>
+                  <a:lnTo>
+                    <a:pt x="5119187" y="2303400"/>
+                  </a:lnTo>
+                  <a:lnTo>
+                    <a:pt x="5195655" y="2298905"/>
+                  </a:lnTo>
+                  <a:lnTo>
+                    <a:pt x="5272124" y="2294386"/>
+                  </a:lnTo>
+                  <a:lnTo>
+                    <a:pt x="5348592" y="2289844"/>
+                  </a:lnTo>
+                  <a:lnTo>
+                    <a:pt x="5425061" y="2285278"/>
+                  </a:lnTo>
+                  <a:lnTo>
+                    <a:pt x="5501529" y="2280690"/>
+                  </a:lnTo>
+                  <a:lnTo>
+                    <a:pt x="5577998" y="2276077"/>
+                  </a:lnTo>
+                  <a:lnTo>
+                    <a:pt x="5654466" y="2271442"/>
+                  </a:lnTo>
+                  <a:lnTo>
+                    <a:pt x="5730934" y="2266782"/>
+                  </a:lnTo>
+                  <a:lnTo>
+                    <a:pt x="5807403" y="2262098"/>
+                  </a:lnTo>
+                  <a:lnTo>
+                    <a:pt x="5883871" y="2257391"/>
+                  </a:lnTo>
+                  <a:lnTo>
+                    <a:pt x="5960340" y="2252659"/>
+                  </a:lnTo>
+                  <a:lnTo>
+                    <a:pt x="6036808" y="2247904"/>
+                  </a:lnTo>
+                  <a:lnTo>
+                    <a:pt x="6113277" y="2243123"/>
+                  </a:lnTo>
+                  <a:lnTo>
+                    <a:pt x="6189745" y="2238319"/>
+                  </a:lnTo>
+                  <a:lnTo>
+                    <a:pt x="6266213" y="2233490"/>
+                  </a:lnTo>
+                  <a:lnTo>
+                    <a:pt x="6342682" y="2228636"/>
+                  </a:lnTo>
+                  <a:lnTo>
+                    <a:pt x="6419150" y="2223757"/>
+                  </a:lnTo>
+                  <a:lnTo>
+                    <a:pt x="6495619" y="2218853"/>
+                  </a:lnTo>
+                  <a:lnTo>
+                    <a:pt x="6572087" y="2213924"/>
+                  </a:lnTo>
+                  <a:lnTo>
+                    <a:pt x="6648556" y="2208970"/>
+                  </a:lnTo>
+                  <a:lnTo>
+                    <a:pt x="6725024" y="2203990"/>
+                  </a:lnTo>
+                  <a:lnTo>
+                    <a:pt x="6801492" y="2198985"/>
+                  </a:lnTo>
+                  <a:lnTo>
+                    <a:pt x="6877961" y="2193954"/>
+                  </a:lnTo>
+                  <a:lnTo>
+                    <a:pt x="6954429" y="2188898"/>
+                  </a:lnTo>
+                  <a:lnTo>
+                    <a:pt x="7030898" y="2183815"/>
+                  </a:lnTo>
+                  <a:lnTo>
+                    <a:pt x="7107366" y="2178707"/>
+                  </a:lnTo>
+                  <a:lnTo>
+                    <a:pt x="7183835" y="2173572"/>
+                  </a:lnTo>
+                  <a:lnTo>
+                    <a:pt x="7260303" y="2168411"/>
+                  </a:lnTo>
+                  <a:lnTo>
+                    <a:pt x="7260303" y="3032290"/>
+                  </a:lnTo>
+                  <a:lnTo>
+                    <a:pt x="7183835" y="3027412"/>
+                  </a:lnTo>
+                  <a:lnTo>
+                    <a:pt x="7107366" y="3022375"/>
+                  </a:lnTo>
+                  <a:lnTo>
+                    <a:pt x="7030898" y="3017173"/>
+                  </a:lnTo>
+                  <a:lnTo>
+                    <a:pt x="6954429" y="3011800"/>
+                  </a:lnTo>
+                  <a:lnTo>
+                    <a:pt x="6877961" y="3006251"/>
+                  </a:lnTo>
+                  <a:lnTo>
+                    <a:pt x="6801492" y="3000521"/>
+                  </a:lnTo>
+                  <a:lnTo>
+                    <a:pt x="6725024" y="2994602"/>
+                  </a:lnTo>
+                  <a:lnTo>
+                    <a:pt x="6648556" y="2988489"/>
+                  </a:lnTo>
+                  <a:lnTo>
+                    <a:pt x="6572087" y="2982176"/>
+                  </a:lnTo>
+                  <a:lnTo>
+                    <a:pt x="6495619" y="2975657"/>
+                  </a:lnTo>
+                  <a:lnTo>
+                    <a:pt x="6419150" y="2968923"/>
+                  </a:lnTo>
+                  <a:lnTo>
+                    <a:pt x="6342682" y="2961968"/>
+                  </a:lnTo>
+                  <a:lnTo>
+                    <a:pt x="6266213" y="2954786"/>
+                  </a:lnTo>
+                  <a:lnTo>
+                    <a:pt x="6189745" y="2947368"/>
+                  </a:lnTo>
+                  <a:lnTo>
+                    <a:pt x="6113277" y="2939707"/>
+                  </a:lnTo>
+                  <a:lnTo>
+                    <a:pt x="6036808" y="2931795"/>
+                  </a:lnTo>
+                  <a:lnTo>
+                    <a:pt x="5960340" y="2923624"/>
+                  </a:lnTo>
+                  <a:lnTo>
+                    <a:pt x="5883871" y="2915184"/>
+                  </a:lnTo>
+                  <a:lnTo>
+                    <a:pt x="5807403" y="2906468"/>
+                  </a:lnTo>
+                  <a:lnTo>
+                    <a:pt x="5730934" y="2897466"/>
+                  </a:lnTo>
+                  <a:lnTo>
+                    <a:pt x="5654466" y="2888170"/>
+                  </a:lnTo>
+                  <a:lnTo>
+                    <a:pt x="5577998" y="2878568"/>
+                  </a:lnTo>
+                  <a:lnTo>
+                    <a:pt x="5501529" y="2868652"/>
+                  </a:lnTo>
+                  <a:lnTo>
+                    <a:pt x="5425061" y="2858410"/>
+                  </a:lnTo>
+                  <a:lnTo>
+                    <a:pt x="5348592" y="2847833"/>
+                  </a:lnTo>
+                  <a:lnTo>
+                    <a:pt x="5272124" y="2836909"/>
+                  </a:lnTo>
+                  <a:lnTo>
+                    <a:pt x="5195655" y="2825627"/>
+                  </a:lnTo>
+                  <a:lnTo>
+                    <a:pt x="5119187" y="2813976"/>
+                  </a:lnTo>
+                  <a:lnTo>
+                    <a:pt x="5042719" y="2801942"/>
+                  </a:lnTo>
+                  <a:lnTo>
+                    <a:pt x="4966250" y="2789514"/>
+                  </a:lnTo>
+                  <a:lnTo>
+                    <a:pt x="4889782" y="2776678"/>
+                  </a:lnTo>
+                  <a:lnTo>
+                    <a:pt x="4813313" y="2763422"/>
+                  </a:lnTo>
+                  <a:lnTo>
+                    <a:pt x="4736845" y="2749731"/>
+                  </a:lnTo>
+                  <a:lnTo>
+                    <a:pt x="4660376" y="2735591"/>
+                  </a:lnTo>
+                  <a:lnTo>
+                    <a:pt x="4583908" y="2720988"/>
+                  </a:lnTo>
+                  <a:lnTo>
+                    <a:pt x="4507439" y="2705906"/>
+                  </a:lnTo>
+                  <a:lnTo>
+                    <a:pt x="4430971" y="2690329"/>
+                  </a:lnTo>
+                  <a:lnTo>
+                    <a:pt x="4354503" y="2674242"/>
+                  </a:lnTo>
+                  <a:lnTo>
+                    <a:pt x="4278034" y="2657628"/>
+                  </a:lnTo>
+                  <a:lnTo>
+                    <a:pt x="4201566" y="2640469"/>
+                  </a:lnTo>
+                  <a:lnTo>
+                    <a:pt x="4125097" y="2622747"/>
+                  </a:lnTo>
+                  <a:lnTo>
+                    <a:pt x="4048629" y="2604445"/>
+                  </a:lnTo>
+                  <a:lnTo>
+                    <a:pt x="3972160" y="2585543"/>
+                  </a:lnTo>
+                  <a:lnTo>
+                    <a:pt x="3895692" y="2566021"/>
+                  </a:lnTo>
+                  <a:lnTo>
+                    <a:pt x="3819224" y="2545859"/>
+                  </a:lnTo>
+                  <a:lnTo>
+                    <a:pt x="3742755" y="2525036"/>
+                  </a:lnTo>
+                  <a:lnTo>
+                    <a:pt x="3666287" y="2503530"/>
+                  </a:lnTo>
+                  <a:lnTo>
+                    <a:pt x="3589818" y="2481320"/>
+                  </a:lnTo>
+                  <a:lnTo>
+                    <a:pt x="3513350" y="2458381"/>
+                  </a:lnTo>
+                  <a:lnTo>
+                    <a:pt x="3436881" y="2434691"/>
+                  </a:lnTo>
+                  <a:lnTo>
+                    <a:pt x="3360413" y="2410224"/>
+                  </a:lnTo>
+                  <a:lnTo>
+                    <a:pt x="3283945" y="2404689"/>
+                  </a:lnTo>
+                  <a:lnTo>
+                    <a:pt x="3207476" y="2408646"/>
+                  </a:lnTo>
+                  <a:lnTo>
+                    <a:pt x="3131008" y="2412582"/>
+                  </a:lnTo>
+                  <a:lnTo>
+                    <a:pt x="3054539" y="2416499"/>
+                  </a:lnTo>
+                  <a:lnTo>
+                    <a:pt x="2978071" y="2420395"/>
+                  </a:lnTo>
+                  <a:lnTo>
+                    <a:pt x="2901602" y="2424272"/>
+                  </a:lnTo>
+                  <a:lnTo>
+                    <a:pt x="2825134" y="2428129"/>
+                  </a:lnTo>
+                  <a:lnTo>
+                    <a:pt x="2748666" y="2431966"/>
+                  </a:lnTo>
+                  <a:lnTo>
+                    <a:pt x="2672197" y="2435784"/>
+                  </a:lnTo>
+                  <a:lnTo>
+                    <a:pt x="2595729" y="2439582"/>
+                  </a:lnTo>
+                  <a:lnTo>
+                    <a:pt x="2519260" y="2443361"/>
+                  </a:lnTo>
+                  <a:lnTo>
+                    <a:pt x="2442792" y="2447121"/>
+                  </a:lnTo>
+                  <a:lnTo>
+                    <a:pt x="2366323" y="2450862"/>
+                  </a:lnTo>
+                  <a:lnTo>
+                    <a:pt x="2289855" y="2454583"/>
+                  </a:lnTo>
+                  <a:lnTo>
+                    <a:pt x="2213386" y="2458286"/>
+                  </a:lnTo>
+                  <a:lnTo>
+                    <a:pt x="2136918" y="2461969"/>
+                  </a:lnTo>
+                  <a:lnTo>
+                    <a:pt x="2060450" y="2465634"/>
+                  </a:lnTo>
+                  <a:lnTo>
+                    <a:pt x="1983981" y="2469280"/>
+                  </a:lnTo>
+                  <a:lnTo>
+                    <a:pt x="1907513" y="2472908"/>
+                  </a:lnTo>
+                  <a:lnTo>
+                    <a:pt x="1831044" y="2476517"/>
+                  </a:lnTo>
+                  <a:lnTo>
+                    <a:pt x="1754576" y="2480107"/>
+                  </a:lnTo>
+                  <a:lnTo>
+                    <a:pt x="1678107" y="2483680"/>
+                  </a:lnTo>
+                  <a:lnTo>
+                    <a:pt x="1601639" y="2487234"/>
+                  </a:lnTo>
+                  <a:lnTo>
+                    <a:pt x="1525171" y="2490770"/>
+                  </a:lnTo>
+                  <a:lnTo>
+                    <a:pt x="1448702" y="2494288"/>
+                  </a:lnTo>
+                  <a:lnTo>
+                    <a:pt x="1372234" y="2497788"/>
+                  </a:lnTo>
+                  <a:lnTo>
+                    <a:pt x="1295765" y="2501271"/>
+                  </a:lnTo>
+                  <a:lnTo>
+                    <a:pt x="1219297" y="2504735"/>
+                  </a:lnTo>
+                  <a:lnTo>
+                    <a:pt x="1142828" y="2508182"/>
+                  </a:lnTo>
+                  <a:lnTo>
+                    <a:pt x="1066360" y="2511611"/>
+                  </a:lnTo>
+                  <a:lnTo>
+                    <a:pt x="989892" y="2515023"/>
+                  </a:lnTo>
+                  <a:lnTo>
+                    <a:pt x="913423" y="2518418"/>
+                  </a:lnTo>
+                  <a:lnTo>
+                    <a:pt x="836955" y="2521795"/>
+                  </a:lnTo>
+                  <a:lnTo>
+                    <a:pt x="760486" y="2525155"/>
+                  </a:lnTo>
+                  <a:lnTo>
+                    <a:pt x="684018" y="2528498"/>
+                  </a:lnTo>
+                  <a:lnTo>
+                    <a:pt x="607549" y="2531823"/>
+                  </a:lnTo>
+                  <a:lnTo>
+                    <a:pt x="531081" y="2535132"/>
+                  </a:lnTo>
+                  <a:lnTo>
+                    <a:pt x="454613" y="2538424"/>
+                  </a:lnTo>
+                  <a:lnTo>
+                    <a:pt x="378144" y="2541699"/>
+                  </a:lnTo>
+                  <a:lnTo>
+                    <a:pt x="301676" y="2544958"/>
+                  </a:lnTo>
+                  <a:lnTo>
+                    <a:pt x="225207" y="2548200"/>
+                  </a:lnTo>
+                  <a:lnTo>
+                    <a:pt x="148739" y="2551425"/>
+                  </a:lnTo>
+                  <a:lnTo>
+                    <a:pt x="72270" y="2554634"/>
+                  </a:lnTo>
+                  <a:lnTo>
+                    <a:pt x="0" y="2557651"/>
                   </a:lnTo>
                   <a:close/>
                 </a:path>
@@ -3603,306 +3990,306 @@
         </p:sp>
         <p:sp>
           <p:nvSpPr>
-            <p:cNvPr id="22" name="pl22"/>
+            <p:cNvPr id="31" name="pl31"/>
             <p:cNvSpPr/>
             <p:nvPr/>
           </p:nvSpPr>
           <p:spPr>
             <a:xfrm>
-              <a:off x="915645" y="2298429"/>
-              <a:ext cx="7260303" cy="2356268"/>
+              <a:off x="915645" y="2276429"/>
+              <a:ext cx="7260303" cy="2400712"/>
             </a:xfrm>
             <a:custGeom>
               <a:avLst/>
               <a:pathLst>
-                <a:path w="7260303" h="2356268">
+                <a:path w="7260303" h="2400712">
                   <a:moveTo>
                     <a:pt x="0" y="0"/>
                   </a:moveTo>
                   <a:lnTo>
-                    <a:pt x="72270" y="93823"/>
-                  </a:lnTo>
-                  <a:lnTo>
-                    <a:pt x="148739" y="189944"/>
-                  </a:lnTo>
-                  <a:lnTo>
-                    <a:pt x="225207" y="283015"/>
-                  </a:lnTo>
-                  <a:lnTo>
-                    <a:pt x="301676" y="373132"/>
-                  </a:lnTo>
-                  <a:lnTo>
-                    <a:pt x="378144" y="460388"/>
-                  </a:lnTo>
-                  <a:lnTo>
-                    <a:pt x="454613" y="544874"/>
-                  </a:lnTo>
-                  <a:lnTo>
-                    <a:pt x="531081" y="626679"/>
-                  </a:lnTo>
-                  <a:lnTo>
-                    <a:pt x="607549" y="705888"/>
-                  </a:lnTo>
-                  <a:lnTo>
-                    <a:pt x="684018" y="782582"/>
-                  </a:lnTo>
-                  <a:lnTo>
-                    <a:pt x="760486" y="856842"/>
-                  </a:lnTo>
-                  <a:lnTo>
-                    <a:pt x="836955" y="928745"/>
-                  </a:lnTo>
-                  <a:lnTo>
-                    <a:pt x="913423" y="998366"/>
-                  </a:lnTo>
-                  <a:lnTo>
-                    <a:pt x="989892" y="1065777"/>
-                  </a:lnTo>
-                  <a:lnTo>
-                    <a:pt x="1066360" y="1131048"/>
-                  </a:lnTo>
-                  <a:lnTo>
-                    <a:pt x="1142828" y="1194248"/>
-                  </a:lnTo>
-                  <a:lnTo>
-                    <a:pt x="1219297" y="1255441"/>
-                  </a:lnTo>
-                  <a:lnTo>
-                    <a:pt x="1295765" y="1314692"/>
-                  </a:lnTo>
-                  <a:lnTo>
-                    <a:pt x="1372234" y="1372063"/>
-                  </a:lnTo>
-                  <a:lnTo>
-                    <a:pt x="1448702" y="1427613"/>
-                  </a:lnTo>
-                  <a:lnTo>
-                    <a:pt x="1525171" y="1481399"/>
-                  </a:lnTo>
-                  <a:lnTo>
-                    <a:pt x="1601639" y="1533478"/>
-                  </a:lnTo>
-                  <a:lnTo>
-                    <a:pt x="1678107" y="1583904"/>
-                  </a:lnTo>
-                  <a:lnTo>
-                    <a:pt x="1754576" y="1632730"/>
-                  </a:lnTo>
-                  <a:lnTo>
-                    <a:pt x="1831044" y="1680006"/>
-                  </a:lnTo>
-                  <a:lnTo>
-                    <a:pt x="1907513" y="1725781"/>
-                  </a:lnTo>
-                  <a:lnTo>
-                    <a:pt x="1983981" y="1770104"/>
-                  </a:lnTo>
-                  <a:lnTo>
-                    <a:pt x="2060450" y="1813019"/>
-                  </a:lnTo>
-                  <a:lnTo>
-                    <a:pt x="2136918" y="1854573"/>
-                  </a:lnTo>
-                  <a:lnTo>
-                    <a:pt x="2213386" y="1894807"/>
-                  </a:lnTo>
-                  <a:lnTo>
-                    <a:pt x="2289855" y="1933765"/>
-                  </a:lnTo>
-                  <a:lnTo>
-                    <a:pt x="2366323" y="1971486"/>
-                  </a:lnTo>
-                  <a:lnTo>
-                    <a:pt x="2442792" y="2008009"/>
-                  </a:lnTo>
-                  <a:lnTo>
-                    <a:pt x="2519260" y="2043373"/>
-                  </a:lnTo>
-                  <a:lnTo>
-                    <a:pt x="2595729" y="2077615"/>
-                  </a:lnTo>
-                  <a:lnTo>
-                    <a:pt x="2672197" y="2110770"/>
-                  </a:lnTo>
-                  <a:lnTo>
-                    <a:pt x="2748666" y="2142873"/>
-                  </a:lnTo>
-                  <a:lnTo>
-                    <a:pt x="2825134" y="2173957"/>
-                  </a:lnTo>
-                  <a:lnTo>
-                    <a:pt x="2901602" y="2204054"/>
-                  </a:lnTo>
-                  <a:lnTo>
-                    <a:pt x="2978071" y="2233196"/>
-                  </a:lnTo>
-                  <a:lnTo>
-                    <a:pt x="3054539" y="2261412"/>
-                  </a:lnTo>
-                  <a:lnTo>
-                    <a:pt x="3131008" y="2288734"/>
-                  </a:lnTo>
-                  <a:lnTo>
-                    <a:pt x="3207476" y="2315188"/>
-                  </a:lnTo>
-                  <a:lnTo>
-                    <a:pt x="3283945" y="2340802"/>
-                  </a:lnTo>
-                  <a:lnTo>
-                    <a:pt x="3360413" y="2356268"/>
-                  </a:lnTo>
-                  <a:lnTo>
-                    <a:pt x="3436881" y="2352344"/>
-                  </a:lnTo>
-                  <a:lnTo>
-                    <a:pt x="3513350" y="2348401"/>
-                  </a:lnTo>
-                  <a:lnTo>
-                    <a:pt x="3589818" y="2344437"/>
-                  </a:lnTo>
-                  <a:lnTo>
-                    <a:pt x="3666287" y="2340453"/>
-                  </a:lnTo>
-                  <a:lnTo>
-                    <a:pt x="3742755" y="2336449"/>
-                  </a:lnTo>
-                  <a:lnTo>
-                    <a:pt x="3819224" y="2332424"/>
-                  </a:lnTo>
-                  <a:lnTo>
-                    <a:pt x="3895692" y="2328378"/>
-                  </a:lnTo>
-                  <a:lnTo>
-                    <a:pt x="3972160" y="2324312"/>
-                  </a:lnTo>
-                  <a:lnTo>
-                    <a:pt x="4048629" y="2320225"/>
-                  </a:lnTo>
-                  <a:lnTo>
-                    <a:pt x="4125097" y="2316117"/>
-                  </a:lnTo>
-                  <a:lnTo>
-                    <a:pt x="4201566" y="2311988"/>
-                  </a:lnTo>
-                  <a:lnTo>
-                    <a:pt x="4278034" y="2307837"/>
-                  </a:lnTo>
-                  <a:lnTo>
-                    <a:pt x="4354503" y="2303666"/>
-                  </a:lnTo>
-                  <a:lnTo>
-                    <a:pt x="4430971" y="2299473"/>
-                  </a:lnTo>
-                  <a:lnTo>
-                    <a:pt x="4507439" y="2295259"/>
-                  </a:lnTo>
-                  <a:lnTo>
-                    <a:pt x="4583908" y="2291023"/>
-                  </a:lnTo>
-                  <a:lnTo>
-                    <a:pt x="4660376" y="2286765"/>
-                  </a:lnTo>
-                  <a:lnTo>
-                    <a:pt x="4736845" y="2282486"/>
-                  </a:lnTo>
-                  <a:lnTo>
-                    <a:pt x="4813313" y="2278184"/>
-                  </a:lnTo>
-                  <a:lnTo>
-                    <a:pt x="4889782" y="2273861"/>
-                  </a:lnTo>
-                  <a:lnTo>
-                    <a:pt x="4966250" y="2269516"/>
-                  </a:lnTo>
-                  <a:lnTo>
-                    <a:pt x="5042719" y="2265148"/>
-                  </a:lnTo>
-                  <a:lnTo>
-                    <a:pt x="5119187" y="2260758"/>
-                  </a:lnTo>
-                  <a:lnTo>
-                    <a:pt x="5195655" y="2256345"/>
-                  </a:lnTo>
-                  <a:lnTo>
-                    <a:pt x="5272124" y="2251910"/>
-                  </a:lnTo>
-                  <a:lnTo>
-                    <a:pt x="5348592" y="2247452"/>
-                  </a:lnTo>
-                  <a:lnTo>
-                    <a:pt x="5425061" y="2242971"/>
-                  </a:lnTo>
-                  <a:lnTo>
-                    <a:pt x="5501529" y="2238467"/>
-                  </a:lnTo>
-                  <a:lnTo>
-                    <a:pt x="5577998" y="2233940"/>
-                  </a:lnTo>
-                  <a:lnTo>
-                    <a:pt x="5654466" y="2229390"/>
-                  </a:lnTo>
-                  <a:lnTo>
-                    <a:pt x="5730934" y="2224817"/>
-                  </a:lnTo>
-                  <a:lnTo>
-                    <a:pt x="5807403" y="2220220"/>
-                  </a:lnTo>
-                  <a:lnTo>
-                    <a:pt x="5883871" y="2215600"/>
-                  </a:lnTo>
-                  <a:lnTo>
-                    <a:pt x="5960340" y="2210956"/>
-                  </a:lnTo>
-                  <a:lnTo>
-                    <a:pt x="6036808" y="2206288"/>
-                  </a:lnTo>
-                  <a:lnTo>
-                    <a:pt x="6113277" y="2201596"/>
-                  </a:lnTo>
-                  <a:lnTo>
-                    <a:pt x="6189745" y="2196881"/>
-                  </a:lnTo>
-                  <a:lnTo>
-                    <a:pt x="6266213" y="2192141"/>
-                  </a:lnTo>
-                  <a:lnTo>
-                    <a:pt x="6342682" y="2187377"/>
-                  </a:lnTo>
-                  <a:lnTo>
-                    <a:pt x="6419150" y="2182588"/>
-                  </a:lnTo>
-                  <a:lnTo>
-                    <a:pt x="6495619" y="2177775"/>
-                  </a:lnTo>
-                  <a:lnTo>
-                    <a:pt x="6572087" y="2172937"/>
-                  </a:lnTo>
-                  <a:lnTo>
-                    <a:pt x="6648556" y="2168075"/>
-                  </a:lnTo>
-                  <a:lnTo>
-                    <a:pt x="6725024" y="2163188"/>
-                  </a:lnTo>
-                  <a:lnTo>
-                    <a:pt x="6801492" y="2158275"/>
-                  </a:lnTo>
-                  <a:lnTo>
-                    <a:pt x="6877961" y="2153337"/>
-                  </a:lnTo>
-                  <a:lnTo>
-                    <a:pt x="6954429" y="2148375"/>
-                  </a:lnTo>
-                  <a:lnTo>
-                    <a:pt x="7030898" y="2143386"/>
-                  </a:lnTo>
-                  <a:lnTo>
-                    <a:pt x="7107366" y="2138372"/>
-                  </a:lnTo>
-                  <a:lnTo>
-                    <a:pt x="7183835" y="2133333"/>
-                  </a:lnTo>
-                  <a:lnTo>
-                    <a:pt x="7260303" y="2128267"/>
+                    <a:pt x="72270" y="95592"/>
+                  </a:lnTo>
+                  <a:lnTo>
+                    <a:pt x="148739" y="193527"/>
+                  </a:lnTo>
+                  <a:lnTo>
+                    <a:pt x="225207" y="288353"/>
+                  </a:lnTo>
+                  <a:lnTo>
+                    <a:pt x="301676" y="380170"/>
+                  </a:lnTo>
+                  <a:lnTo>
+                    <a:pt x="378144" y="469072"/>
+                  </a:lnTo>
+                  <a:lnTo>
+                    <a:pt x="454613" y="555152"/>
+                  </a:lnTo>
+                  <a:lnTo>
+                    <a:pt x="531081" y="638500"/>
+                  </a:lnTo>
+                  <a:lnTo>
+                    <a:pt x="607549" y="719202"/>
+                  </a:lnTo>
+                  <a:lnTo>
+                    <a:pt x="684018" y="797343"/>
+                  </a:lnTo>
+                  <a:lnTo>
+                    <a:pt x="760486" y="873004"/>
+                  </a:lnTo>
+                  <a:lnTo>
+                    <a:pt x="836955" y="946263"/>
+                  </a:lnTo>
+                  <a:lnTo>
+                    <a:pt x="913423" y="1017197"/>
+                  </a:lnTo>
+                  <a:lnTo>
+                    <a:pt x="989892" y="1085880"/>
+                  </a:lnTo>
+                  <a:lnTo>
+                    <a:pt x="1066360" y="1152382"/>
+                  </a:lnTo>
+                  <a:lnTo>
+                    <a:pt x="1142828" y="1216774"/>
+                  </a:lnTo>
+                  <a:lnTo>
+                    <a:pt x="1219297" y="1279122"/>
+                  </a:lnTo>
+                  <a:lnTo>
+                    <a:pt x="1295765" y="1339490"/>
+                  </a:lnTo>
+                  <a:lnTo>
+                    <a:pt x="1372234" y="1397943"/>
+                  </a:lnTo>
+                  <a:lnTo>
+                    <a:pt x="1448702" y="1454541"/>
+                  </a:lnTo>
+                  <a:lnTo>
+                    <a:pt x="1525171" y="1509342"/>
+                  </a:lnTo>
+                  <a:lnTo>
+                    <a:pt x="1601639" y="1562403"/>
+                  </a:lnTo>
+                  <a:lnTo>
+                    <a:pt x="1678107" y="1613780"/>
+                  </a:lnTo>
+                  <a:lnTo>
+                    <a:pt x="1754576" y="1663527"/>
+                  </a:lnTo>
+                  <a:lnTo>
+                    <a:pt x="1831044" y="1711695"/>
+                  </a:lnTo>
+                  <a:lnTo>
+                    <a:pt x="1907513" y="1758333"/>
+                  </a:lnTo>
+                  <a:lnTo>
+                    <a:pt x="1983981" y="1803492"/>
+                  </a:lnTo>
+                  <a:lnTo>
+                    <a:pt x="2060450" y="1847217"/>
+                  </a:lnTo>
+                  <a:lnTo>
+                    <a:pt x="2136918" y="1889554"/>
+                  </a:lnTo>
+                  <a:lnTo>
+                    <a:pt x="2213386" y="1930547"/>
+                  </a:lnTo>
+                  <a:lnTo>
+                    <a:pt x="2289855" y="1970240"/>
+                  </a:lnTo>
+                  <a:lnTo>
+                    <a:pt x="2366323" y="2008672"/>
+                  </a:lnTo>
+                  <a:lnTo>
+                    <a:pt x="2442792" y="2045885"/>
+                  </a:lnTo>
+                  <a:lnTo>
+                    <a:pt x="2519260" y="2081916"/>
+                  </a:lnTo>
+                  <a:lnTo>
+                    <a:pt x="2595729" y="2116804"/>
+                  </a:lnTo>
+                  <a:lnTo>
+                    <a:pt x="2672197" y="2150584"/>
+                  </a:lnTo>
+                  <a:lnTo>
+                    <a:pt x="2748666" y="2183292"/>
+                  </a:lnTo>
+                  <a:lnTo>
+                    <a:pt x="2825134" y="2214962"/>
+                  </a:lnTo>
+                  <a:lnTo>
+                    <a:pt x="2901602" y="2245627"/>
+                  </a:lnTo>
+                  <a:lnTo>
+                    <a:pt x="2978071" y="2275319"/>
+                  </a:lnTo>
+                  <a:lnTo>
+                    <a:pt x="3054539" y="2304068"/>
+                  </a:lnTo>
+                  <a:lnTo>
+                    <a:pt x="3131008" y="2331904"/>
+                  </a:lnTo>
+                  <a:lnTo>
+                    <a:pt x="3207476" y="2358857"/>
+                  </a:lnTo>
+                  <a:lnTo>
+                    <a:pt x="3283945" y="2384955"/>
+                  </a:lnTo>
+                  <a:lnTo>
+                    <a:pt x="3360413" y="2400712"/>
+                  </a:lnTo>
+                  <a:lnTo>
+                    <a:pt x="3436881" y="2396715"/>
+                  </a:lnTo>
+                  <a:lnTo>
+                    <a:pt x="3513350" y="2392697"/>
+                  </a:lnTo>
+                  <a:lnTo>
+                    <a:pt x="3589818" y="2388658"/>
+                  </a:lnTo>
+                  <a:lnTo>
+                    <a:pt x="3666287" y="2384599"/>
+                  </a:lnTo>
+                  <a:lnTo>
+                    <a:pt x="3742755" y="2380519"/>
+                  </a:lnTo>
+                  <a:lnTo>
+                    <a:pt x="3819224" y="2376418"/>
+                  </a:lnTo>
+                  <a:lnTo>
+                    <a:pt x="3895692" y="2372296"/>
+                  </a:lnTo>
+                  <a:lnTo>
+                    <a:pt x="3972160" y="2368153"/>
+                  </a:lnTo>
+                  <a:lnTo>
+                    <a:pt x="4048629" y="2363989"/>
+                  </a:lnTo>
+                  <a:lnTo>
+                    <a:pt x="4125097" y="2359804"/>
+                  </a:lnTo>
+                  <a:lnTo>
+                    <a:pt x="4201566" y="2355597"/>
+                  </a:lnTo>
+                  <a:lnTo>
+                    <a:pt x="4278034" y="2351368"/>
+                  </a:lnTo>
+                  <a:lnTo>
+                    <a:pt x="4354503" y="2347118"/>
+                  </a:lnTo>
+                  <a:lnTo>
+                    <a:pt x="4430971" y="2342846"/>
+                  </a:lnTo>
+                  <a:lnTo>
+                    <a:pt x="4507439" y="2338552"/>
+                  </a:lnTo>
+                  <a:lnTo>
+                    <a:pt x="4583908" y="2334237"/>
+                  </a:lnTo>
+                  <a:lnTo>
+                    <a:pt x="4660376" y="2329899"/>
+                  </a:lnTo>
+                  <a:lnTo>
+                    <a:pt x="4736845" y="2325539"/>
+                  </a:lnTo>
+                  <a:lnTo>
+                    <a:pt x="4813313" y="2321156"/>
+                  </a:lnTo>
+                  <a:lnTo>
+                    <a:pt x="4889782" y="2316751"/>
+                  </a:lnTo>
+                  <a:lnTo>
+                    <a:pt x="4966250" y="2312324"/>
+                  </a:lnTo>
+                  <a:lnTo>
+                    <a:pt x="5042719" y="2307873"/>
+                  </a:lnTo>
+                  <a:lnTo>
+                    <a:pt x="5119187" y="2303400"/>
+                  </a:lnTo>
+                  <a:lnTo>
+                    <a:pt x="5195655" y="2298905"/>
+                  </a:lnTo>
+                  <a:lnTo>
+                    <a:pt x="5272124" y="2294386"/>
+                  </a:lnTo>
+                  <a:lnTo>
+                    <a:pt x="5348592" y="2289844"/>
+                  </a:lnTo>
+                  <a:lnTo>
+                    <a:pt x="5425061" y="2285278"/>
+                  </a:lnTo>
+                  <a:lnTo>
+                    <a:pt x="5501529" y="2280690"/>
+                  </a:lnTo>
+                  <a:lnTo>
+                    <a:pt x="5577998" y="2276077"/>
+                  </a:lnTo>
+                  <a:lnTo>
+                    <a:pt x="5654466" y="2271442"/>
+                  </a:lnTo>
+                  <a:lnTo>
+                    <a:pt x="5730934" y="2266782"/>
+                  </a:lnTo>
+                  <a:lnTo>
+                    <a:pt x="5807403" y="2262098"/>
+                  </a:lnTo>
+                  <a:lnTo>
+                    <a:pt x="5883871" y="2257391"/>
+                  </a:lnTo>
+                  <a:lnTo>
+                    <a:pt x="5960340" y="2252659"/>
+                  </a:lnTo>
+                  <a:lnTo>
+                    <a:pt x="6036808" y="2247904"/>
+                  </a:lnTo>
+                  <a:lnTo>
+                    <a:pt x="6113277" y="2243123"/>
+                  </a:lnTo>
+                  <a:lnTo>
+                    <a:pt x="6189745" y="2238319"/>
+                  </a:lnTo>
+                  <a:lnTo>
+                    <a:pt x="6266213" y="2233490"/>
+                  </a:lnTo>
+                  <a:lnTo>
+                    <a:pt x="6342682" y="2228636"/>
+                  </a:lnTo>
+                  <a:lnTo>
+                    <a:pt x="6419150" y="2223757"/>
+                  </a:lnTo>
+                  <a:lnTo>
+                    <a:pt x="6495619" y="2218853"/>
+                  </a:lnTo>
+                  <a:lnTo>
+                    <a:pt x="6572087" y="2213924"/>
+                  </a:lnTo>
+                  <a:lnTo>
+                    <a:pt x="6648556" y="2208970"/>
+                  </a:lnTo>
+                  <a:lnTo>
+                    <a:pt x="6725024" y="2203990"/>
+                  </a:lnTo>
+                  <a:lnTo>
+                    <a:pt x="6801492" y="2198985"/>
+                  </a:lnTo>
+                  <a:lnTo>
+                    <a:pt x="6877961" y="2193954"/>
+                  </a:lnTo>
+                  <a:lnTo>
+                    <a:pt x="6954429" y="2188898"/>
+                  </a:lnTo>
+                  <a:lnTo>
+                    <a:pt x="7030898" y="2183815"/>
+                  </a:lnTo>
+                  <a:lnTo>
+                    <a:pt x="7107366" y="2178707"/>
+                  </a:lnTo>
+                  <a:lnTo>
+                    <a:pt x="7183835" y="2173572"/>
+                  </a:lnTo>
+                  <a:lnTo>
+                    <a:pt x="7260303" y="2168411"/>
                   </a:lnTo>
                 </a:path>
               </a:pathLst>
@@ -3916,306 +4303,306 @@
         </p:sp>
         <p:sp>
           <p:nvSpPr>
-            <p:cNvPr id="23" name="pl23"/>
+            <p:cNvPr id="32" name="pl32"/>
             <p:cNvSpPr/>
             <p:nvPr/>
           </p:nvSpPr>
           <p:spPr>
             <a:xfrm>
-              <a:off x="915645" y="4658600"/>
-              <a:ext cx="7260303" cy="615981"/>
+              <a:off x="915645" y="4681119"/>
+              <a:ext cx="7260303" cy="627600"/>
             </a:xfrm>
             <a:custGeom>
               <a:avLst/>
               <a:pathLst>
-                <a:path w="7260303" h="615981">
+                <a:path w="7260303" h="627600">
                   <a:moveTo>
-                    <a:pt x="7260303" y="615981"/>
+                    <a:pt x="7260303" y="627600"/>
                   </a:moveTo>
                   <a:lnTo>
-                    <a:pt x="7183835" y="611194"/>
-                  </a:lnTo>
-                  <a:lnTo>
-                    <a:pt x="7107366" y="606250"/>
-                  </a:lnTo>
-                  <a:lnTo>
-                    <a:pt x="7030898" y="601145"/>
-                  </a:lnTo>
-                  <a:lnTo>
-                    <a:pt x="6954429" y="595871"/>
-                  </a:lnTo>
-                  <a:lnTo>
-                    <a:pt x="6877961" y="590425"/>
-                  </a:lnTo>
-                  <a:lnTo>
-                    <a:pt x="6801492" y="584801"/>
-                  </a:lnTo>
-                  <a:lnTo>
-                    <a:pt x="6725024" y="578992"/>
-                  </a:lnTo>
-                  <a:lnTo>
-                    <a:pt x="6648556" y="572992"/>
-                  </a:lnTo>
-                  <a:lnTo>
-                    <a:pt x="6572087" y="566796"/>
-                  </a:lnTo>
-                  <a:lnTo>
-                    <a:pt x="6495619" y="560397"/>
-                  </a:lnTo>
-                  <a:lnTo>
-                    <a:pt x="6419150" y="553788"/>
-                  </a:lnTo>
-                  <a:lnTo>
-                    <a:pt x="6342682" y="546962"/>
-                  </a:lnTo>
-                  <a:lnTo>
-                    <a:pt x="6266213" y="539913"/>
-                  </a:lnTo>
-                  <a:lnTo>
-                    <a:pt x="6189745" y="532632"/>
-                  </a:lnTo>
-                  <a:lnTo>
-                    <a:pt x="6113277" y="525113"/>
-                  </a:lnTo>
-                  <a:lnTo>
-                    <a:pt x="6036808" y="517347"/>
-                  </a:lnTo>
-                  <a:lnTo>
-                    <a:pt x="5960340" y="509327"/>
-                  </a:lnTo>
-                  <a:lnTo>
-                    <a:pt x="5883871" y="501044"/>
-                  </a:lnTo>
-                  <a:lnTo>
-                    <a:pt x="5807403" y="492489"/>
-                  </a:lnTo>
-                  <a:lnTo>
-                    <a:pt x="5730934" y="483654"/>
-                  </a:lnTo>
-                  <a:lnTo>
-                    <a:pt x="5654466" y="474529"/>
-                  </a:lnTo>
-                  <a:lnTo>
-                    <a:pt x="5577998" y="465106"/>
-                  </a:lnTo>
-                  <a:lnTo>
-                    <a:pt x="5501529" y="455373"/>
-                  </a:lnTo>
-                  <a:lnTo>
-                    <a:pt x="5425061" y="445321"/>
-                  </a:lnTo>
-                  <a:lnTo>
-                    <a:pt x="5348592" y="434940"/>
-                  </a:lnTo>
-                  <a:lnTo>
-                    <a:pt x="5272124" y="424218"/>
-                  </a:lnTo>
-                  <a:lnTo>
-                    <a:pt x="5195655" y="413145"/>
-                  </a:lnTo>
-                  <a:lnTo>
-                    <a:pt x="5119187" y="401709"/>
-                  </a:lnTo>
-                  <a:lnTo>
-                    <a:pt x="5042719" y="389898"/>
-                  </a:lnTo>
-                  <a:lnTo>
-                    <a:pt x="4966250" y="377700"/>
-                  </a:lnTo>
-                  <a:lnTo>
-                    <a:pt x="4889782" y="365102"/>
-                  </a:lnTo>
-                  <a:lnTo>
-                    <a:pt x="4813313" y="352091"/>
-                  </a:lnTo>
-                  <a:lnTo>
-                    <a:pt x="4736845" y="338653"/>
-                  </a:lnTo>
-                  <a:lnTo>
-                    <a:pt x="4660376" y="324775"/>
-                  </a:lnTo>
-                  <a:lnTo>
-                    <a:pt x="4583908" y="310442"/>
-                  </a:lnTo>
-                  <a:lnTo>
-                    <a:pt x="4507439" y="295640"/>
-                  </a:lnTo>
-                  <a:lnTo>
-                    <a:pt x="4430971" y="280352"/>
-                  </a:lnTo>
-                  <a:lnTo>
-                    <a:pt x="4354503" y="264562"/>
-                  </a:lnTo>
-                  <a:lnTo>
-                    <a:pt x="4278034" y="248256"/>
-                  </a:lnTo>
-                  <a:lnTo>
-                    <a:pt x="4201566" y="231414"/>
-                  </a:lnTo>
-                  <a:lnTo>
-                    <a:pt x="4125097" y="214021"/>
-                  </a:lnTo>
-                  <a:lnTo>
-                    <a:pt x="4048629" y="196057"/>
-                  </a:lnTo>
-                  <a:lnTo>
-                    <a:pt x="3972160" y="177505"/>
-                  </a:lnTo>
-                  <a:lnTo>
-                    <a:pt x="3895692" y="158344"/>
-                  </a:lnTo>
-                  <a:lnTo>
-                    <a:pt x="3819224" y="138556"/>
-                  </a:lnTo>
-                  <a:lnTo>
-                    <a:pt x="3742755" y="118118"/>
-                  </a:lnTo>
-                  <a:lnTo>
-                    <a:pt x="3666287" y="97011"/>
-                  </a:lnTo>
-                  <a:lnTo>
-                    <a:pt x="3589818" y="75212"/>
-                  </a:lnTo>
-                  <a:lnTo>
-                    <a:pt x="3513350" y="52698"/>
-                  </a:lnTo>
-                  <a:lnTo>
-                    <a:pt x="3436881" y="29446"/>
-                  </a:lnTo>
-                  <a:lnTo>
-                    <a:pt x="3360413" y="5432"/>
+                    <a:pt x="7183835" y="622723"/>
+                  </a:lnTo>
+                  <a:lnTo>
+                    <a:pt x="7107366" y="617686"/>
+                  </a:lnTo>
+                  <a:lnTo>
+                    <a:pt x="7030898" y="612484"/>
+                  </a:lnTo>
+                  <a:lnTo>
+                    <a:pt x="6954429" y="607111"/>
+                  </a:lnTo>
+                  <a:lnTo>
+                    <a:pt x="6877961" y="601562"/>
+                  </a:lnTo>
+                  <a:lnTo>
+                    <a:pt x="6801492" y="595831"/>
+                  </a:lnTo>
+                  <a:lnTo>
+                    <a:pt x="6725024" y="589913"/>
+                  </a:lnTo>
+                  <a:lnTo>
+                    <a:pt x="6648556" y="583800"/>
+                  </a:lnTo>
+                  <a:lnTo>
+                    <a:pt x="6572087" y="577487"/>
+                  </a:lnTo>
+                  <a:lnTo>
+                    <a:pt x="6495619" y="570967"/>
+                  </a:lnTo>
+                  <a:lnTo>
+                    <a:pt x="6419150" y="564233"/>
+                  </a:lnTo>
+                  <a:lnTo>
+                    <a:pt x="6342682" y="557279"/>
+                  </a:lnTo>
+                  <a:lnTo>
+                    <a:pt x="6266213" y="550097"/>
+                  </a:lnTo>
+                  <a:lnTo>
+                    <a:pt x="6189745" y="542679"/>
+                  </a:lnTo>
+                  <a:lnTo>
+                    <a:pt x="6113277" y="535018"/>
+                  </a:lnTo>
+                  <a:lnTo>
+                    <a:pt x="6036808" y="527106"/>
+                  </a:lnTo>
+                  <a:lnTo>
+                    <a:pt x="5960340" y="518934"/>
+                  </a:lnTo>
+                  <a:lnTo>
+                    <a:pt x="5883871" y="510495"/>
+                  </a:lnTo>
+                  <a:lnTo>
+                    <a:pt x="5807403" y="501779"/>
+                  </a:lnTo>
+                  <a:lnTo>
+                    <a:pt x="5730934" y="492777"/>
+                  </a:lnTo>
+                  <a:lnTo>
+                    <a:pt x="5654466" y="483480"/>
+                  </a:lnTo>
+                  <a:lnTo>
+                    <a:pt x="5577998" y="473879"/>
+                  </a:lnTo>
+                  <a:lnTo>
+                    <a:pt x="5501529" y="463962"/>
+                  </a:lnTo>
+                  <a:lnTo>
+                    <a:pt x="5425061" y="453721"/>
+                  </a:lnTo>
+                  <a:lnTo>
+                    <a:pt x="5348592" y="443144"/>
+                  </a:lnTo>
+                  <a:lnTo>
+                    <a:pt x="5272124" y="432220"/>
+                  </a:lnTo>
+                  <a:lnTo>
+                    <a:pt x="5195655" y="420938"/>
+                  </a:lnTo>
+                  <a:lnTo>
+                    <a:pt x="5119187" y="409286"/>
+                  </a:lnTo>
+                  <a:lnTo>
+                    <a:pt x="5042719" y="397252"/>
+                  </a:lnTo>
+                  <a:lnTo>
+                    <a:pt x="4966250" y="384824"/>
+                  </a:lnTo>
+                  <a:lnTo>
+                    <a:pt x="4889782" y="371988"/>
+                  </a:lnTo>
+                  <a:lnTo>
+                    <a:pt x="4813313" y="358732"/>
+                  </a:lnTo>
+                  <a:lnTo>
+                    <a:pt x="4736845" y="345041"/>
+                  </a:lnTo>
+                  <a:lnTo>
+                    <a:pt x="4660376" y="330901"/>
+                  </a:lnTo>
+                  <a:lnTo>
+                    <a:pt x="4583908" y="316298"/>
+                  </a:lnTo>
+                  <a:lnTo>
+                    <a:pt x="4507439" y="301216"/>
+                  </a:lnTo>
+                  <a:lnTo>
+                    <a:pt x="4430971" y="285640"/>
+                  </a:lnTo>
+                  <a:lnTo>
+                    <a:pt x="4354503" y="269553"/>
+                  </a:lnTo>
+                  <a:lnTo>
+                    <a:pt x="4278034" y="252938"/>
+                  </a:lnTo>
+                  <a:lnTo>
+                    <a:pt x="4201566" y="235779"/>
+                  </a:lnTo>
+                  <a:lnTo>
+                    <a:pt x="4125097" y="218058"/>
+                  </a:lnTo>
+                  <a:lnTo>
+                    <a:pt x="4048629" y="199755"/>
+                  </a:lnTo>
+                  <a:lnTo>
+                    <a:pt x="3972160" y="180853"/>
+                  </a:lnTo>
+                  <a:lnTo>
+                    <a:pt x="3895692" y="161331"/>
+                  </a:lnTo>
+                  <a:lnTo>
+                    <a:pt x="3819224" y="141169"/>
+                  </a:lnTo>
+                  <a:lnTo>
+                    <a:pt x="3742755" y="120346"/>
+                  </a:lnTo>
+                  <a:lnTo>
+                    <a:pt x="3666287" y="98841"/>
+                  </a:lnTo>
+                  <a:lnTo>
+                    <a:pt x="3589818" y="76630"/>
+                  </a:lnTo>
+                  <a:lnTo>
+                    <a:pt x="3513350" y="53692"/>
+                  </a:lnTo>
+                  <a:lnTo>
+                    <a:pt x="3436881" y="30001"/>
+                  </a:lnTo>
+                  <a:lnTo>
+                    <a:pt x="3360413" y="5534"/>
                   </a:lnTo>
                   <a:lnTo>
                     <a:pt x="3283945" y="0"/>
                   </a:lnTo>
                   <a:lnTo>
-                    <a:pt x="3207476" y="3883"/>
-                  </a:lnTo>
-                  <a:lnTo>
-                    <a:pt x="3131008" y="7747"/>
-                  </a:lnTo>
-                  <a:lnTo>
-                    <a:pt x="3054539" y="11591"/>
-                  </a:lnTo>
-                  <a:lnTo>
-                    <a:pt x="2978071" y="15415"/>
-                  </a:lnTo>
-                  <a:lnTo>
-                    <a:pt x="2901602" y="19220"/>
-                  </a:lnTo>
-                  <a:lnTo>
-                    <a:pt x="2825134" y="23006"/>
-                  </a:lnTo>
-                  <a:lnTo>
-                    <a:pt x="2748666" y="26772"/>
-                  </a:lnTo>
-                  <a:lnTo>
-                    <a:pt x="2672197" y="30519"/>
-                  </a:lnTo>
-                  <a:lnTo>
-                    <a:pt x="2595729" y="34247"/>
-                  </a:lnTo>
-                  <a:lnTo>
-                    <a:pt x="2519260" y="37956"/>
-                  </a:lnTo>
-                  <a:lnTo>
-                    <a:pt x="2442792" y="41646"/>
-                  </a:lnTo>
-                  <a:lnTo>
-                    <a:pt x="2366323" y="45317"/>
-                  </a:lnTo>
-                  <a:lnTo>
-                    <a:pt x="2289855" y="48970"/>
-                  </a:lnTo>
-                  <a:lnTo>
-                    <a:pt x="2213386" y="52604"/>
-                  </a:lnTo>
-                  <a:lnTo>
-                    <a:pt x="2136918" y="56219"/>
-                  </a:lnTo>
-                  <a:lnTo>
-                    <a:pt x="2060450" y="59816"/>
-                  </a:lnTo>
-                  <a:lnTo>
-                    <a:pt x="1983981" y="63395"/>
-                  </a:lnTo>
-                  <a:lnTo>
-                    <a:pt x="1907513" y="66955"/>
-                  </a:lnTo>
-                  <a:lnTo>
-                    <a:pt x="1831044" y="70498"/>
-                  </a:lnTo>
-                  <a:lnTo>
-                    <a:pt x="1754576" y="74022"/>
-                  </a:lnTo>
-                  <a:lnTo>
-                    <a:pt x="1678107" y="77528"/>
-                  </a:lnTo>
-                  <a:lnTo>
-                    <a:pt x="1601639" y="81016"/>
-                  </a:lnTo>
-                  <a:lnTo>
-                    <a:pt x="1525171" y="84487"/>
-                  </a:lnTo>
-                  <a:lnTo>
-                    <a:pt x="1448702" y="87940"/>
-                  </a:lnTo>
-                  <a:lnTo>
-                    <a:pt x="1372234" y="91375"/>
-                  </a:lnTo>
-                  <a:lnTo>
-                    <a:pt x="1295765" y="94793"/>
-                  </a:lnTo>
-                  <a:lnTo>
-                    <a:pt x="1219297" y="98194"/>
-                  </a:lnTo>
-                  <a:lnTo>
-                    <a:pt x="1142828" y="101577"/>
-                  </a:lnTo>
-                  <a:lnTo>
-                    <a:pt x="1066360" y="104942"/>
-                  </a:lnTo>
-                  <a:lnTo>
-                    <a:pt x="989892" y="108291"/>
-                  </a:lnTo>
-                  <a:lnTo>
-                    <a:pt x="913423" y="111623"/>
-                  </a:lnTo>
-                  <a:lnTo>
-                    <a:pt x="836955" y="114937"/>
-                  </a:lnTo>
-                  <a:lnTo>
-                    <a:pt x="760486" y="118235"/>
-                  </a:lnTo>
-                  <a:lnTo>
-                    <a:pt x="684018" y="121516"/>
-                  </a:lnTo>
-                  <a:lnTo>
-                    <a:pt x="607549" y="124780"/>
-                  </a:lnTo>
-                  <a:lnTo>
-                    <a:pt x="531081" y="128028"/>
-                  </a:lnTo>
-                  <a:lnTo>
-                    <a:pt x="454613" y="131259"/>
-                  </a:lnTo>
-                  <a:lnTo>
-                    <a:pt x="378144" y="134473"/>
-                  </a:lnTo>
-                  <a:lnTo>
-                    <a:pt x="301676" y="137672"/>
-                  </a:lnTo>
-                  <a:lnTo>
-                    <a:pt x="225207" y="140853"/>
-                  </a:lnTo>
-                  <a:lnTo>
-                    <a:pt x="148739" y="144019"/>
-                  </a:lnTo>
-                  <a:lnTo>
-                    <a:pt x="72270" y="147169"/>
-                  </a:lnTo>
-                  <a:lnTo>
-                    <a:pt x="0" y="150130"/>
+                    <a:pt x="3207476" y="3956"/>
+                  </a:lnTo>
+                  <a:lnTo>
+                    <a:pt x="3131008" y="7893"/>
+                  </a:lnTo>
+                  <a:lnTo>
+                    <a:pt x="3054539" y="11809"/>
+                  </a:lnTo>
+                  <a:lnTo>
+                    <a:pt x="2978071" y="15706"/>
+                  </a:lnTo>
+                  <a:lnTo>
+                    <a:pt x="2901602" y="19583"/>
+                  </a:lnTo>
+                  <a:lnTo>
+                    <a:pt x="2825134" y="23440"/>
+                  </a:lnTo>
+                  <a:lnTo>
+                    <a:pt x="2748666" y="27277"/>
+                  </a:lnTo>
+                  <a:lnTo>
+                    <a:pt x="2672197" y="31095"/>
+                  </a:lnTo>
+                  <a:lnTo>
+                    <a:pt x="2595729" y="34893"/>
+                  </a:lnTo>
+                  <a:lnTo>
+                    <a:pt x="2519260" y="38672"/>
+                  </a:lnTo>
+                  <a:lnTo>
+                    <a:pt x="2442792" y="42432"/>
+                  </a:lnTo>
+                  <a:lnTo>
+                    <a:pt x="2366323" y="46172"/>
+                  </a:lnTo>
+                  <a:lnTo>
+                    <a:pt x="2289855" y="49894"/>
+                  </a:lnTo>
+                  <a:lnTo>
+                    <a:pt x="2213386" y="53596"/>
+                  </a:lnTo>
+                  <a:lnTo>
+                    <a:pt x="2136918" y="57280"/>
+                  </a:lnTo>
+                  <a:lnTo>
+                    <a:pt x="2060450" y="60944"/>
+                  </a:lnTo>
+                  <a:lnTo>
+                    <a:pt x="1983981" y="64591"/>
+                  </a:lnTo>
+                  <a:lnTo>
+                    <a:pt x="1907513" y="68218"/>
+                  </a:lnTo>
+                  <a:lnTo>
+                    <a:pt x="1831044" y="71827"/>
+                  </a:lnTo>
+                  <a:lnTo>
+                    <a:pt x="1754576" y="75418"/>
+                  </a:lnTo>
+                  <a:lnTo>
+                    <a:pt x="1678107" y="78990"/>
+                  </a:lnTo>
+                  <a:lnTo>
+                    <a:pt x="1601639" y="82545"/>
+                  </a:lnTo>
+                  <a:lnTo>
+                    <a:pt x="1525171" y="86081"/>
+                  </a:lnTo>
+                  <a:lnTo>
+                    <a:pt x="1448702" y="89599"/>
+                  </a:lnTo>
+                  <a:lnTo>
+                    <a:pt x="1372234" y="93099"/>
+                  </a:lnTo>
+                  <a:lnTo>
+                    <a:pt x="1295765" y="96581"/>
+                  </a:lnTo>
+                  <a:lnTo>
+                    <a:pt x="1219297" y="100046"/>
+                  </a:lnTo>
+                  <a:lnTo>
+                    <a:pt x="1142828" y="103493"/>
+                  </a:lnTo>
+                  <a:lnTo>
+                    <a:pt x="1066360" y="106922"/>
+                  </a:lnTo>
+                  <a:lnTo>
+                    <a:pt x="989892" y="110334"/>
+                  </a:lnTo>
+                  <a:lnTo>
+                    <a:pt x="913423" y="113728"/>
+                  </a:lnTo>
+                  <a:lnTo>
+                    <a:pt x="836955" y="117105"/>
+                  </a:lnTo>
+                  <a:lnTo>
+                    <a:pt x="760486" y="120465"/>
+                  </a:lnTo>
+                  <a:lnTo>
+                    <a:pt x="684018" y="123808"/>
+                  </a:lnTo>
+                  <a:lnTo>
+                    <a:pt x="607549" y="127134"/>
+                  </a:lnTo>
+                  <a:lnTo>
+                    <a:pt x="531081" y="130443"/>
+                  </a:lnTo>
+                  <a:lnTo>
+                    <a:pt x="454613" y="133735"/>
+                  </a:lnTo>
+                  <a:lnTo>
+                    <a:pt x="378144" y="137010"/>
+                  </a:lnTo>
+                  <a:lnTo>
+                    <a:pt x="301676" y="140268"/>
+                  </a:lnTo>
+                  <a:lnTo>
+                    <a:pt x="225207" y="143510"/>
+                  </a:lnTo>
+                  <a:lnTo>
+                    <a:pt x="148739" y="146736"/>
+                  </a:lnTo>
+                  <a:lnTo>
+                    <a:pt x="72270" y="149945"/>
+                  </a:lnTo>
+                  <a:lnTo>
+                    <a:pt x="0" y="152962"/>
                   </a:lnTo>
                 </a:path>
               </a:pathLst>
@@ -4229,306 +4616,306 @@
         </p:sp>
         <p:sp>
           <p:nvSpPr>
-            <p:cNvPr id="24" name="pl24"/>
+            <p:cNvPr id="33" name="pl33"/>
             <p:cNvSpPr/>
             <p:nvPr/>
           </p:nvSpPr>
           <p:spPr>
             <a:xfrm>
-              <a:off x="915645" y="4038451"/>
-              <a:ext cx="7260303" cy="1001187"/>
+              <a:off x="915645" y="4049273"/>
+              <a:ext cx="7260303" cy="1020072"/>
             </a:xfrm>
             <a:custGeom>
               <a:avLst/>
               <a:pathLst>
-                <a:path w="7260303" h="1001187">
+                <a:path w="7260303" h="1020072">
                   <a:moveTo>
                     <a:pt x="0" y="0"/>
                   </a:moveTo>
                   <a:lnTo>
-                    <a:pt x="72270" y="17623"/>
-                  </a:lnTo>
-                  <a:lnTo>
-                    <a:pt x="148739" y="36018"/>
-                  </a:lnTo>
-                  <a:lnTo>
-                    <a:pt x="225207" y="54166"/>
-                  </a:lnTo>
-                  <a:lnTo>
-                    <a:pt x="301676" y="72069"/>
-                  </a:lnTo>
-                  <a:lnTo>
-                    <a:pt x="378144" y="89730"/>
-                  </a:lnTo>
-                  <a:lnTo>
-                    <a:pt x="454613" y="107154"/>
-                  </a:lnTo>
-                  <a:lnTo>
-                    <a:pt x="531081" y="124342"/>
-                  </a:lnTo>
-                  <a:lnTo>
-                    <a:pt x="607549" y="141299"/>
-                  </a:lnTo>
-                  <a:lnTo>
-                    <a:pt x="684018" y="158027"/>
-                  </a:lnTo>
-                  <a:lnTo>
-                    <a:pt x="760486" y="174530"/>
-                  </a:lnTo>
-                  <a:lnTo>
-                    <a:pt x="836955" y="190810"/>
-                  </a:lnTo>
-                  <a:lnTo>
-                    <a:pt x="913423" y="206871"/>
-                  </a:lnTo>
-                  <a:lnTo>
-                    <a:pt x="989892" y="222715"/>
-                  </a:lnTo>
-                  <a:lnTo>
-                    <a:pt x="1066360" y="238346"/>
-                  </a:lnTo>
-                  <a:lnTo>
-                    <a:pt x="1142828" y="253766"/>
-                  </a:lnTo>
-                  <a:lnTo>
-                    <a:pt x="1219297" y="268978"/>
-                  </a:lnTo>
-                  <a:lnTo>
-                    <a:pt x="1295765" y="283985"/>
-                  </a:lnTo>
-                  <a:lnTo>
-                    <a:pt x="1372234" y="298789"/>
-                  </a:lnTo>
-                  <a:lnTo>
-                    <a:pt x="1448702" y="313394"/>
-                  </a:lnTo>
-                  <a:lnTo>
-                    <a:pt x="1525171" y="327802"/>
-                  </a:lnTo>
-                  <a:lnTo>
-                    <a:pt x="1601639" y="342016"/>
-                  </a:lnTo>
-                  <a:lnTo>
-                    <a:pt x="1678107" y="356039"/>
-                  </a:lnTo>
-                  <a:lnTo>
-                    <a:pt x="1754576" y="369872"/>
-                  </a:lnTo>
-                  <a:lnTo>
-                    <a:pt x="1831044" y="383519"/>
-                  </a:lnTo>
-                  <a:lnTo>
-                    <a:pt x="1907513" y="396982"/>
-                  </a:lnTo>
-                  <a:lnTo>
-                    <a:pt x="1983981" y="410263"/>
-                  </a:lnTo>
-                  <a:lnTo>
-                    <a:pt x="2060450" y="423365"/>
-                  </a:lnTo>
-                  <a:lnTo>
-                    <a:pt x="2136918" y="436291"/>
-                  </a:lnTo>
-                  <a:lnTo>
-                    <a:pt x="2213386" y="449042"/>
-                  </a:lnTo>
-                  <a:lnTo>
-                    <a:pt x="2289855" y="461622"/>
-                  </a:lnTo>
-                  <a:lnTo>
-                    <a:pt x="2366323" y="474031"/>
-                  </a:lnTo>
-                  <a:lnTo>
-                    <a:pt x="2442792" y="486274"/>
-                  </a:lnTo>
-                  <a:lnTo>
-                    <a:pt x="2519260" y="498352"/>
-                  </a:lnTo>
-                  <a:lnTo>
-                    <a:pt x="2595729" y="510266"/>
-                  </a:lnTo>
-                  <a:lnTo>
-                    <a:pt x="2672197" y="522020"/>
-                  </a:lnTo>
-                  <a:lnTo>
-                    <a:pt x="2748666" y="533616"/>
-                  </a:lnTo>
-                  <a:lnTo>
-                    <a:pt x="2825134" y="545055"/>
-                  </a:lnTo>
-                  <a:lnTo>
-                    <a:pt x="2901602" y="556340"/>
-                  </a:lnTo>
-                  <a:lnTo>
-                    <a:pt x="2978071" y="567473"/>
-                  </a:lnTo>
-                  <a:lnTo>
-                    <a:pt x="3054539" y="578456"/>
-                  </a:lnTo>
-                  <a:lnTo>
-                    <a:pt x="3131008" y="589291"/>
-                  </a:lnTo>
-                  <a:lnTo>
-                    <a:pt x="3207476" y="599980"/>
-                  </a:lnTo>
-                  <a:lnTo>
-                    <a:pt x="3283945" y="610525"/>
-                  </a:lnTo>
-                  <a:lnTo>
-                    <a:pt x="3360413" y="620927"/>
-                  </a:lnTo>
-                  <a:lnTo>
-                    <a:pt x="3436881" y="631189"/>
-                  </a:lnTo>
-                  <a:lnTo>
-                    <a:pt x="3513350" y="641313"/>
-                  </a:lnTo>
-                  <a:lnTo>
-                    <a:pt x="3589818" y="651301"/>
-                  </a:lnTo>
-                  <a:lnTo>
-                    <a:pt x="3666287" y="661153"/>
-                  </a:lnTo>
-                  <a:lnTo>
-                    <a:pt x="3742755" y="670873"/>
-                  </a:lnTo>
-                  <a:lnTo>
-                    <a:pt x="3819224" y="680462"/>
-                  </a:lnTo>
-                  <a:lnTo>
-                    <a:pt x="3895692" y="689922"/>
-                  </a:lnTo>
-                  <a:lnTo>
-                    <a:pt x="3972160" y="699254"/>
-                  </a:lnTo>
-                  <a:lnTo>
-                    <a:pt x="4048629" y="708460"/>
-                  </a:lnTo>
-                  <a:lnTo>
-                    <a:pt x="4125097" y="717543"/>
-                  </a:lnTo>
-                  <a:lnTo>
-                    <a:pt x="4201566" y="726502"/>
-                  </a:lnTo>
-                  <a:lnTo>
-                    <a:pt x="4278034" y="735341"/>
-                  </a:lnTo>
-                  <a:lnTo>
-                    <a:pt x="4354503" y="744061"/>
-                  </a:lnTo>
-                  <a:lnTo>
-                    <a:pt x="4430971" y="752664"/>
-                  </a:lnTo>
-                  <a:lnTo>
-                    <a:pt x="4507439" y="761150"/>
-                  </a:lnTo>
-                  <a:lnTo>
-                    <a:pt x="4583908" y="769522"/>
-                  </a:lnTo>
-                  <a:lnTo>
-                    <a:pt x="4660376" y="777781"/>
-                  </a:lnTo>
-                  <a:lnTo>
-                    <a:pt x="4736845" y="785928"/>
-                  </a:lnTo>
-                  <a:lnTo>
-                    <a:pt x="4813313" y="793966"/>
-                  </a:lnTo>
-                  <a:lnTo>
-                    <a:pt x="4889782" y="801896"/>
-                  </a:lnTo>
-                  <a:lnTo>
-                    <a:pt x="4966250" y="809718"/>
-                  </a:lnTo>
-                  <a:lnTo>
-                    <a:pt x="5042719" y="817436"/>
-                  </a:lnTo>
-                  <a:lnTo>
-                    <a:pt x="5119187" y="825049"/>
-                  </a:lnTo>
-                  <a:lnTo>
-                    <a:pt x="5195655" y="832559"/>
-                  </a:lnTo>
-                  <a:lnTo>
-                    <a:pt x="5272124" y="839968"/>
-                  </a:lnTo>
-                  <a:lnTo>
-                    <a:pt x="5348592" y="847278"/>
-                  </a:lnTo>
-                  <a:lnTo>
-                    <a:pt x="5425061" y="854488"/>
-                  </a:lnTo>
-                  <a:lnTo>
-                    <a:pt x="5501529" y="861602"/>
-                  </a:lnTo>
-                  <a:lnTo>
-                    <a:pt x="5577998" y="868620"/>
-                  </a:lnTo>
-                  <a:lnTo>
-                    <a:pt x="5654466" y="875543"/>
-                  </a:lnTo>
-                  <a:lnTo>
-                    <a:pt x="5730934" y="882373"/>
-                  </a:lnTo>
-                  <a:lnTo>
-                    <a:pt x="5807403" y="889110"/>
-                  </a:lnTo>
-                  <a:lnTo>
-                    <a:pt x="5883871" y="895757"/>
-                  </a:lnTo>
-                  <a:lnTo>
-                    <a:pt x="5960340" y="902314"/>
-                  </a:lnTo>
-                  <a:lnTo>
-                    <a:pt x="6036808" y="908783"/>
-                  </a:lnTo>
-                  <a:lnTo>
-                    <a:pt x="6113277" y="915165"/>
-                  </a:lnTo>
-                  <a:lnTo>
-                    <a:pt x="6189745" y="921460"/>
-                  </a:lnTo>
-                  <a:lnTo>
-                    <a:pt x="6266213" y="927671"/>
-                  </a:lnTo>
-                  <a:lnTo>
-                    <a:pt x="6342682" y="933798"/>
-                  </a:lnTo>
-                  <a:lnTo>
-                    <a:pt x="6419150" y="939842"/>
-                  </a:lnTo>
-                  <a:lnTo>
-                    <a:pt x="6495619" y="945805"/>
-                  </a:lnTo>
-                  <a:lnTo>
-                    <a:pt x="6572087" y="951688"/>
-                  </a:lnTo>
-                  <a:lnTo>
-                    <a:pt x="6648556" y="957491"/>
-                  </a:lnTo>
-                  <a:lnTo>
-                    <a:pt x="6725024" y="963216"/>
-                  </a:lnTo>
-                  <a:lnTo>
-                    <a:pt x="6801492" y="968864"/>
-                  </a:lnTo>
-                  <a:lnTo>
-                    <a:pt x="6877961" y="974436"/>
-                  </a:lnTo>
-                  <a:lnTo>
-                    <a:pt x="6954429" y="979932"/>
-                  </a:lnTo>
-                  <a:lnTo>
-                    <a:pt x="7030898" y="985355"/>
-                  </a:lnTo>
-                  <a:lnTo>
-                    <a:pt x="7107366" y="990704"/>
-                  </a:lnTo>
-                  <a:lnTo>
-                    <a:pt x="7183835" y="995981"/>
-                  </a:lnTo>
-                  <a:lnTo>
-                    <a:pt x="7260303" y="1001187"/>
+                    <a:pt x="72270" y="17955"/>
+                  </a:lnTo>
+                  <a:lnTo>
+                    <a:pt x="148739" y="36698"/>
+                  </a:lnTo>
+                  <a:lnTo>
+                    <a:pt x="225207" y="55188"/>
+                  </a:lnTo>
+                  <a:lnTo>
+                    <a:pt x="301676" y="73428"/>
+                  </a:lnTo>
+                  <a:lnTo>
+                    <a:pt x="378144" y="91423"/>
+                  </a:lnTo>
+                  <a:lnTo>
+                    <a:pt x="454613" y="109175"/>
+                  </a:lnTo>
+                  <a:lnTo>
+                    <a:pt x="531081" y="126688"/>
+                  </a:lnTo>
+                  <a:lnTo>
+                    <a:pt x="607549" y="143964"/>
+                  </a:lnTo>
+                  <a:lnTo>
+                    <a:pt x="684018" y="161008"/>
+                  </a:lnTo>
+                  <a:lnTo>
+                    <a:pt x="760486" y="177822"/>
+                  </a:lnTo>
+                  <a:lnTo>
+                    <a:pt x="836955" y="194409"/>
+                  </a:lnTo>
+                  <a:lnTo>
+                    <a:pt x="913423" y="210773"/>
+                  </a:lnTo>
+                  <a:lnTo>
+                    <a:pt x="989892" y="226916"/>
+                  </a:lnTo>
+                  <a:lnTo>
+                    <a:pt x="1066360" y="242841"/>
+                  </a:lnTo>
+                  <a:lnTo>
+                    <a:pt x="1142828" y="258552"/>
+                  </a:lnTo>
+                  <a:lnTo>
+                    <a:pt x="1219297" y="274051"/>
+                  </a:lnTo>
+                  <a:lnTo>
+                    <a:pt x="1295765" y="289341"/>
+                  </a:lnTo>
+                  <a:lnTo>
+                    <a:pt x="1372234" y="304425"/>
+                  </a:lnTo>
+                  <a:lnTo>
+                    <a:pt x="1448702" y="319306"/>
+                  </a:lnTo>
+                  <a:lnTo>
+                    <a:pt x="1525171" y="333986"/>
+                  </a:lnTo>
+                  <a:lnTo>
+                    <a:pt x="1601639" y="348468"/>
+                  </a:lnTo>
+                  <a:lnTo>
+                    <a:pt x="1678107" y="362754"/>
+                  </a:lnTo>
+                  <a:lnTo>
+                    <a:pt x="1754576" y="376849"/>
+                  </a:lnTo>
+                  <a:lnTo>
+                    <a:pt x="1831044" y="390753"/>
+                  </a:lnTo>
+                  <a:lnTo>
+                    <a:pt x="1907513" y="404469"/>
+                  </a:lnTo>
+                  <a:lnTo>
+                    <a:pt x="1983981" y="418001"/>
+                  </a:lnTo>
+                  <a:lnTo>
+                    <a:pt x="2060450" y="431351"/>
+                  </a:lnTo>
+                  <a:lnTo>
+                    <a:pt x="2136918" y="444520"/>
+                  </a:lnTo>
+                  <a:lnTo>
+                    <a:pt x="2213386" y="457512"/>
+                  </a:lnTo>
+                  <a:lnTo>
+                    <a:pt x="2289855" y="470329"/>
+                  </a:lnTo>
+                  <a:lnTo>
+                    <a:pt x="2366323" y="482973"/>
+                  </a:lnTo>
+                  <a:lnTo>
+                    <a:pt x="2442792" y="495446"/>
+                  </a:lnTo>
+                  <a:lnTo>
+                    <a:pt x="2519260" y="507752"/>
+                  </a:lnTo>
+                  <a:lnTo>
+                    <a:pt x="2595729" y="519891"/>
+                  </a:lnTo>
+                  <a:lnTo>
+                    <a:pt x="2672197" y="531867"/>
+                  </a:lnTo>
+                  <a:lnTo>
+                    <a:pt x="2748666" y="543681"/>
+                  </a:lnTo>
+                  <a:lnTo>
+                    <a:pt x="2825134" y="555336"/>
+                  </a:lnTo>
+                  <a:lnTo>
+                    <a:pt x="2901602" y="566834"/>
+                  </a:lnTo>
+                  <a:lnTo>
+                    <a:pt x="2978071" y="578177"/>
+                  </a:lnTo>
+                  <a:lnTo>
+                    <a:pt x="3054539" y="589367"/>
+                  </a:lnTo>
+                  <a:lnTo>
+                    <a:pt x="3131008" y="600406"/>
+                  </a:lnTo>
+                  <a:lnTo>
+                    <a:pt x="3207476" y="611297"/>
+                  </a:lnTo>
+                  <a:lnTo>
+                    <a:pt x="3283945" y="622040"/>
+                  </a:lnTo>
+                  <a:lnTo>
+                    <a:pt x="3360413" y="632639"/>
+                  </a:lnTo>
+                  <a:lnTo>
+                    <a:pt x="3436881" y="643095"/>
+                  </a:lnTo>
+                  <a:lnTo>
+                    <a:pt x="3513350" y="653410"/>
+                  </a:lnTo>
+                  <a:lnTo>
+                    <a:pt x="3589818" y="663586"/>
+                  </a:lnTo>
+                  <a:lnTo>
+                    <a:pt x="3666287" y="673624"/>
+                  </a:lnTo>
+                  <a:lnTo>
+                    <a:pt x="3742755" y="683528"/>
+                  </a:lnTo>
+                  <a:lnTo>
+                    <a:pt x="3819224" y="693297"/>
+                  </a:lnTo>
+                  <a:lnTo>
+                    <a:pt x="3895692" y="702935"/>
+                  </a:lnTo>
+                  <a:lnTo>
+                    <a:pt x="3972160" y="712444"/>
+                  </a:lnTo>
+                  <a:lnTo>
+                    <a:pt x="4048629" y="721824"/>
+                  </a:lnTo>
+                  <a:lnTo>
+                    <a:pt x="4125097" y="731077"/>
+                  </a:lnTo>
+                  <a:lnTo>
+                    <a:pt x="4201566" y="740206"/>
+                  </a:lnTo>
+                  <a:lnTo>
+                    <a:pt x="4278034" y="749212"/>
+                  </a:lnTo>
+                  <a:lnTo>
+                    <a:pt x="4354503" y="758096"/>
+                  </a:lnTo>
+                  <a:lnTo>
+                    <a:pt x="4430971" y="766860"/>
+                  </a:lnTo>
+                  <a:lnTo>
+                    <a:pt x="4507439" y="775507"/>
+                  </a:lnTo>
+                  <a:lnTo>
+                    <a:pt x="4583908" y="784037"/>
+                  </a:lnTo>
+                  <a:lnTo>
+                    <a:pt x="4660376" y="792451"/>
+                  </a:lnTo>
+                  <a:lnTo>
+                    <a:pt x="4736845" y="800753"/>
+                  </a:lnTo>
+                  <a:lnTo>
+                    <a:pt x="4813313" y="808942"/>
+                  </a:lnTo>
+                  <a:lnTo>
+                    <a:pt x="4889782" y="817021"/>
+                  </a:lnTo>
+                  <a:lnTo>
+                    <a:pt x="4966250" y="824991"/>
+                  </a:lnTo>
+                  <a:lnTo>
+                    <a:pt x="5042719" y="832854"/>
+                  </a:lnTo>
+                  <a:lnTo>
+                    <a:pt x="5119187" y="840611"/>
+                  </a:lnTo>
+                  <a:lnTo>
+                    <a:pt x="5195655" y="848263"/>
+                  </a:lnTo>
+                  <a:lnTo>
+                    <a:pt x="5272124" y="855812"/>
+                  </a:lnTo>
+                  <a:lnTo>
+                    <a:pt x="5348592" y="863259"/>
+                  </a:lnTo>
+                  <a:lnTo>
+                    <a:pt x="5425061" y="870606"/>
+                  </a:lnTo>
+                  <a:lnTo>
+                    <a:pt x="5501529" y="877854"/>
+                  </a:lnTo>
+                  <a:lnTo>
+                    <a:pt x="5577998" y="885004"/>
+                  </a:lnTo>
+                  <a:lnTo>
+                    <a:pt x="5654466" y="892057"/>
+                  </a:lnTo>
+                  <a:lnTo>
+                    <a:pt x="5730934" y="899016"/>
+                  </a:lnTo>
+                  <a:lnTo>
+                    <a:pt x="5807403" y="905881"/>
+                  </a:lnTo>
+                  <a:lnTo>
+                    <a:pt x="5883871" y="912653"/>
+                  </a:lnTo>
+                  <a:lnTo>
+                    <a:pt x="5960340" y="919334"/>
+                  </a:lnTo>
+                  <a:lnTo>
+                    <a:pt x="6036808" y="925925"/>
+                  </a:lnTo>
+                  <a:lnTo>
+                    <a:pt x="6113277" y="932427"/>
+                  </a:lnTo>
+                  <a:lnTo>
+                    <a:pt x="6189745" y="938841"/>
+                  </a:lnTo>
+                  <a:lnTo>
+                    <a:pt x="6266213" y="945169"/>
+                  </a:lnTo>
+                  <a:lnTo>
+                    <a:pt x="6342682" y="951412"/>
+                  </a:lnTo>
+                  <a:lnTo>
+                    <a:pt x="6419150" y="957570"/>
+                  </a:lnTo>
+                  <a:lnTo>
+                    <a:pt x="6495619" y="963645"/>
+                  </a:lnTo>
+                  <a:lnTo>
+                    <a:pt x="6572087" y="969639"/>
+                  </a:lnTo>
+                  <a:lnTo>
+                    <a:pt x="6648556" y="975552"/>
+                  </a:lnTo>
+                  <a:lnTo>
+                    <a:pt x="6725024" y="981384"/>
+                  </a:lnTo>
+                  <a:lnTo>
+                    <a:pt x="6801492" y="987139"/>
+                  </a:lnTo>
+                  <a:lnTo>
+                    <a:pt x="6877961" y="992816"/>
+                  </a:lnTo>
+                  <a:lnTo>
+                    <a:pt x="6954429" y="998416"/>
+                  </a:lnTo>
+                  <a:lnTo>
+                    <a:pt x="7030898" y="1003941"/>
+                  </a:lnTo>
+                  <a:lnTo>
+                    <a:pt x="7107366" y="1009391"/>
+                  </a:lnTo>
+                  <a:lnTo>
+                    <a:pt x="7183835" y="1014768"/>
+                  </a:lnTo>
+                  <a:lnTo>
+                    <a:pt x="7260303" y="1020072"/>
                   </a:lnTo>
                 </a:path>
               </a:pathLst>
@@ -4551,13 +4938,13 @@
         </p:sp>
         <p:sp>
           <p:nvSpPr>
-            <p:cNvPr id="25" name="pl25"/>
+            <p:cNvPr id="34" name="pl34"/>
             <p:cNvSpPr/>
             <p:nvPr/>
           </p:nvSpPr>
           <p:spPr>
             <a:xfrm>
-              <a:off x="915645" y="4655980"/>
+              <a:off x="915645" y="4678449"/>
               <a:ext cx="7682587" cy="0"/>
             </a:xfrm>
             <a:custGeom>
@@ -4594,21 +4981,21 @@
         </p:sp>
         <p:sp>
           <p:nvSpPr>
-            <p:cNvPr id="26" name="pl26"/>
+            <p:cNvPr id="35" name="pl35"/>
             <p:cNvSpPr/>
             <p:nvPr/>
           </p:nvSpPr>
           <p:spPr>
             <a:xfrm>
-              <a:off x="4250960" y="2209169"/>
-              <a:ext cx="0" cy="3364365"/>
+              <a:off x="4250960" y="2185486"/>
+              <a:ext cx="0" cy="3427824"/>
             </a:xfrm>
             <a:custGeom>
               <a:avLst/>
               <a:pathLst>
-                <a:path w="0" h="3364365">
+                <a:path w="0" h="3427824">
                   <a:moveTo>
-                    <a:pt x="0" y="3364365"/>
+                    <a:pt x="0" y="3427824"/>
                   </a:moveTo>
                   <a:lnTo>
                     <a:pt x="0" y="0"/>
@@ -4637,13 +5024,13 @@
         </p:sp>
         <p:sp>
           <p:nvSpPr>
-            <p:cNvPr id="27" name="tx27"/>
+            <p:cNvPr id="36" name="tx36"/>
             <p:cNvSpPr/>
             <p:nvPr/>
           </p:nvSpPr>
           <p:spPr>
             <a:xfrm>
-              <a:off x="756929" y="5369631"/>
+              <a:off x="756929" y="5406523"/>
               <a:ext cx="79004" cy="101955"/>
             </a:xfrm>
             <a:prstGeom prst="rect">
@@ -4683,13 +5070,13 @@
         </p:sp>
         <p:sp>
           <p:nvSpPr>
-            <p:cNvPr id="28" name="tx28"/>
+            <p:cNvPr id="37" name="tx37"/>
             <p:cNvSpPr/>
             <p:nvPr/>
           </p:nvSpPr>
           <p:spPr>
             <a:xfrm>
-              <a:off x="756929" y="4605002"/>
+              <a:off x="756929" y="4627472"/>
               <a:ext cx="79004" cy="101955"/>
             </a:xfrm>
             <a:prstGeom prst="rect">
@@ -4729,13 +5116,13 @@
         </p:sp>
         <p:sp>
           <p:nvSpPr>
-            <p:cNvPr id="29" name="tx29"/>
+            <p:cNvPr id="38" name="tx38"/>
             <p:cNvSpPr/>
             <p:nvPr/>
           </p:nvSpPr>
           <p:spPr>
             <a:xfrm>
-              <a:off x="756929" y="3840374"/>
+              <a:off x="756929" y="3848420"/>
               <a:ext cx="79004" cy="101955"/>
             </a:xfrm>
             <a:prstGeom prst="rect">
@@ -4775,13 +5162,13 @@
         </p:sp>
         <p:sp>
           <p:nvSpPr>
-            <p:cNvPr id="30" name="tx30"/>
+            <p:cNvPr id="39" name="tx39"/>
             <p:cNvSpPr/>
             <p:nvPr/>
           </p:nvSpPr>
           <p:spPr>
             <a:xfrm>
-              <a:off x="756929" y="3075745"/>
+              <a:off x="756929" y="3069369"/>
               <a:ext cx="79004" cy="101955"/>
             </a:xfrm>
             <a:prstGeom prst="rect">
@@ -4821,13 +5208,13 @@
         </p:sp>
         <p:sp>
           <p:nvSpPr>
-            <p:cNvPr id="31" name="tx31"/>
+            <p:cNvPr id="40" name="tx40"/>
             <p:cNvSpPr/>
             <p:nvPr/>
           </p:nvSpPr>
           <p:spPr>
             <a:xfrm>
-              <a:off x="756929" y="2311117"/>
+              <a:off x="756929" y="2290318"/>
               <a:ext cx="79004" cy="101955"/>
             </a:xfrm>
             <a:prstGeom prst="rect">
@@ -4867,14 +5254,14 @@
         </p:sp>
         <p:sp>
           <p:nvSpPr>
-            <p:cNvPr id="32" name="tx32"/>
+            <p:cNvPr id="41" name="tx41"/>
             <p:cNvSpPr/>
             <p:nvPr/>
           </p:nvSpPr>
           <p:spPr>
             <a:xfrm>
-              <a:off x="2451993" y="5653245"/>
-              <a:ext cx="244784" cy="101955"/>
+              <a:off x="1598722" y="5693022"/>
+              <a:ext cx="205282" cy="101955"/>
             </a:xfrm>
             <a:prstGeom prst="rect">
               <a:avLst/>
@@ -4906,21 +5293,21 @@
                   <a:latin typeface="Helvetica"/>
                   <a:cs typeface="Helvetica"/>
                 </a:rPr>
-                <a:t>-0.2</a:t>
+                <a:t>-30</a:t>
               </a:r>
             </a:p>
           </p:txBody>
         </p:sp>
         <p:sp>
           <p:nvSpPr>
-            <p:cNvPr id="33" name="tx33"/>
+            <p:cNvPr id="42" name="tx42"/>
             <p:cNvSpPr/>
             <p:nvPr/>
           </p:nvSpPr>
           <p:spPr>
             <a:xfrm>
-              <a:off x="4221672" y="5653245"/>
-              <a:ext cx="197510" cy="101955"/>
+              <a:off x="2471744" y="5693022"/>
+              <a:ext cx="205282" cy="101955"/>
             </a:xfrm>
             <a:prstGeom prst="rect">
               <a:avLst/>
@@ -4952,21 +5339,21 @@
                   <a:latin typeface="Helvetica"/>
                   <a:cs typeface="Helvetica"/>
                 </a:rPr>
-                <a:t>0.0</a:t>
+                <a:t>-20</a:t>
               </a:r>
             </a:p>
           </p:txBody>
         </p:sp>
         <p:sp>
           <p:nvSpPr>
-            <p:cNvPr id="34" name="tx34"/>
+            <p:cNvPr id="43" name="tx43"/>
             <p:cNvSpPr/>
             <p:nvPr/>
           </p:nvSpPr>
           <p:spPr>
             <a:xfrm>
-              <a:off x="5967715" y="5653245"/>
-              <a:ext cx="197510" cy="101955"/>
+              <a:off x="3344765" y="5693022"/>
+              <a:ext cx="205282" cy="101955"/>
             </a:xfrm>
             <a:prstGeom prst="rect">
               <a:avLst/>
@@ -4998,21 +5385,21 @@
                   <a:latin typeface="Helvetica"/>
                   <a:cs typeface="Helvetica"/>
                 </a:rPr>
-                <a:t>0.2</a:t>
+                <a:t>-10</a:t>
               </a:r>
             </a:p>
           </p:txBody>
         </p:sp>
         <p:sp>
           <p:nvSpPr>
-            <p:cNvPr id="35" name="tx35"/>
+            <p:cNvPr id="44" name="tx44"/>
             <p:cNvSpPr/>
             <p:nvPr/>
           </p:nvSpPr>
           <p:spPr>
             <a:xfrm>
-              <a:off x="7713757" y="5653245"/>
-              <a:ext cx="197510" cy="101955"/>
+              <a:off x="4280925" y="5693022"/>
+              <a:ext cx="79004" cy="101955"/>
             </a:xfrm>
             <a:prstGeom prst="rect">
               <a:avLst/>
@@ -5044,21 +5431,205 @@
                   <a:latin typeface="Helvetica"/>
                   <a:cs typeface="Helvetica"/>
                 </a:rPr>
-                <a:t>0.4</a:t>
+                <a:t>0</a:t>
               </a:r>
             </a:p>
           </p:txBody>
         </p:sp>
         <p:sp>
           <p:nvSpPr>
-            <p:cNvPr id="36" name="tx36"/>
+            <p:cNvPr id="45" name="tx45"/>
             <p:cNvSpPr/>
             <p:nvPr/>
           </p:nvSpPr>
           <p:spPr>
             <a:xfrm>
-              <a:off x="2688337" y="5834415"/>
-              <a:ext cx="2138873" cy="127558"/>
+              <a:off x="5114445" y="5693022"/>
+              <a:ext cx="158008" cy="101955"/>
+            </a:xfrm>
+            <a:prstGeom prst="rect">
+              <a:avLst/>
+            </a:prstGeom>
+            <a:noFill/>
+          </p:spPr>
+          <p:txBody>
+            <a:bodyPr lIns="0" rIns="0" tIns="0" bIns="0" anchorCtr="1" anchor="ctr" wrap="none"/>
+            <a:lstStyle/>
+            <a:p>
+              <a:pPr algn="l" marL="0" marR="0" indent="0">
+                <a:lnSpc>
+                  <a:spcPts val="1120"/>
+                </a:lnSpc>
+                <a:spcBef>
+                  <a:spcPts val="0"/>
+                </a:spcBef>
+                <a:spcAft>
+                  <a:spcPts val="0"/>
+                </a:spcAft>
+              </a:pPr>
+              <a:r>
+                <a:rPr sz="1120">
+                  <a:solidFill>
+                    <a:srgbClr val="4D4D4D">
+                      <a:alpha val="100000"/>
+                    </a:srgbClr>
+                  </a:solidFill>
+                  <a:latin typeface="Helvetica"/>
+                  <a:cs typeface="Helvetica"/>
+                </a:rPr>
+                <a:t>10</a:t>
+              </a:r>
+            </a:p>
+          </p:txBody>
+        </p:sp>
+        <p:sp>
+          <p:nvSpPr>
+            <p:cNvPr id="46" name="tx46"/>
+            <p:cNvSpPr/>
+            <p:nvPr/>
+          </p:nvSpPr>
+          <p:spPr>
+            <a:xfrm>
+              <a:off x="5987466" y="5693022"/>
+              <a:ext cx="158008" cy="101955"/>
+            </a:xfrm>
+            <a:prstGeom prst="rect">
+              <a:avLst/>
+            </a:prstGeom>
+            <a:noFill/>
+          </p:spPr>
+          <p:txBody>
+            <a:bodyPr lIns="0" rIns="0" tIns="0" bIns="0" anchorCtr="1" anchor="ctr" wrap="none"/>
+            <a:lstStyle/>
+            <a:p>
+              <a:pPr algn="l" marL="0" marR="0" indent="0">
+                <a:lnSpc>
+                  <a:spcPts val="1120"/>
+                </a:lnSpc>
+                <a:spcBef>
+                  <a:spcPts val="0"/>
+                </a:spcBef>
+                <a:spcAft>
+                  <a:spcPts val="0"/>
+                </a:spcAft>
+              </a:pPr>
+              <a:r>
+                <a:rPr sz="1120">
+                  <a:solidFill>
+                    <a:srgbClr val="4D4D4D">
+                      <a:alpha val="100000"/>
+                    </a:srgbClr>
+                  </a:solidFill>
+                  <a:latin typeface="Helvetica"/>
+                  <a:cs typeface="Helvetica"/>
+                </a:rPr>
+                <a:t>20</a:t>
+              </a:r>
+            </a:p>
+          </p:txBody>
+        </p:sp>
+        <p:sp>
+          <p:nvSpPr>
+            <p:cNvPr id="47" name="tx47"/>
+            <p:cNvSpPr/>
+            <p:nvPr/>
+          </p:nvSpPr>
+          <p:spPr>
+            <a:xfrm>
+              <a:off x="6860487" y="5693022"/>
+              <a:ext cx="158008" cy="101955"/>
+            </a:xfrm>
+            <a:prstGeom prst="rect">
+              <a:avLst/>
+            </a:prstGeom>
+            <a:noFill/>
+          </p:spPr>
+          <p:txBody>
+            <a:bodyPr lIns="0" rIns="0" tIns="0" bIns="0" anchorCtr="1" anchor="ctr" wrap="none"/>
+            <a:lstStyle/>
+            <a:p>
+              <a:pPr algn="l" marL="0" marR="0" indent="0">
+                <a:lnSpc>
+                  <a:spcPts val="1120"/>
+                </a:lnSpc>
+                <a:spcBef>
+                  <a:spcPts val="0"/>
+                </a:spcBef>
+                <a:spcAft>
+                  <a:spcPts val="0"/>
+                </a:spcAft>
+              </a:pPr>
+              <a:r>
+                <a:rPr sz="1120">
+                  <a:solidFill>
+                    <a:srgbClr val="4D4D4D">
+                      <a:alpha val="100000"/>
+                    </a:srgbClr>
+                  </a:solidFill>
+                  <a:latin typeface="Helvetica"/>
+                  <a:cs typeface="Helvetica"/>
+                </a:rPr>
+                <a:t>30</a:t>
+              </a:r>
+            </a:p>
+          </p:txBody>
+        </p:sp>
+        <p:sp>
+          <p:nvSpPr>
+            <p:cNvPr id="48" name="tx48"/>
+            <p:cNvSpPr/>
+            <p:nvPr/>
+          </p:nvSpPr>
+          <p:spPr>
+            <a:xfrm>
+              <a:off x="7733508" y="5693022"/>
+              <a:ext cx="158008" cy="101955"/>
+            </a:xfrm>
+            <a:prstGeom prst="rect">
+              <a:avLst/>
+            </a:prstGeom>
+            <a:noFill/>
+          </p:spPr>
+          <p:txBody>
+            <a:bodyPr lIns="0" rIns="0" tIns="0" bIns="0" anchorCtr="1" anchor="ctr" wrap="none"/>
+            <a:lstStyle/>
+            <a:p>
+              <a:pPr algn="l" marL="0" marR="0" indent="0">
+                <a:lnSpc>
+                  <a:spcPts val="1120"/>
+                </a:lnSpc>
+                <a:spcBef>
+                  <a:spcPts val="0"/>
+                </a:spcBef>
+                <a:spcAft>
+                  <a:spcPts val="0"/>
+                </a:spcAft>
+              </a:pPr>
+              <a:r>
+                <a:rPr sz="1120">
+                  <a:solidFill>
+                    <a:srgbClr val="4D4D4D">
+                      <a:alpha val="100000"/>
+                    </a:srgbClr>
+                  </a:solidFill>
+                  <a:latin typeface="Helvetica"/>
+                  <a:cs typeface="Helvetica"/>
+                </a:rPr>
+                <a:t>40</a:t>
+              </a:r>
+            </a:p>
+          </p:txBody>
+        </p:sp>
+        <p:sp>
+          <p:nvSpPr>
+            <p:cNvPr id="49" name="tx49"/>
+            <p:cNvSpPr/>
+            <p:nvPr/>
+          </p:nvSpPr>
+          <p:spPr>
+            <a:xfrm>
+              <a:off x="3941888" y="5870717"/>
+              <a:ext cx="1630100" cy="127558"/>
             </a:xfrm>
             <a:prstGeom prst="rect">
               <a:avLst/>
@@ -5090,572 +5661,20 @@
                   <a:latin typeface="Helvetica"/>
                   <a:cs typeface="Helvetica"/>
                 </a:rPr>
-                <a:t>eGFR difference  =  (eGFR</a:t>
+                <a:t>eGFR difference (%)</a:t>
               </a:r>
             </a:p>
           </p:txBody>
         </p:sp>
         <p:sp>
           <p:nvSpPr>
-            <p:cNvPr id="37" name="tx37"/>
-            <p:cNvSpPr/>
-            <p:nvPr/>
-          </p:nvSpPr>
-          <p:spPr>
-            <a:xfrm>
-              <a:off x="4827210" y="5905308"/>
-              <a:ext cx="89885" cy="89245"/>
-            </a:xfrm>
-            <a:prstGeom prst="rect">
-              <a:avLst/>
-            </a:prstGeom>
-            <a:noFill/>
-          </p:spPr>
-          <p:txBody>
-            <a:bodyPr lIns="0" rIns="0" tIns="0" bIns="0" anchorCtr="1" anchor="ctr" wrap="none"/>
-            <a:lstStyle/>
-            <a:p>
-              <a:pPr algn="l" marL="0" marR="0" indent="0">
-                <a:lnSpc>
-                  <a:spcPts val="979"/>
-                </a:lnSpc>
-                <a:spcBef>
-                  <a:spcPts val="0"/>
-                </a:spcBef>
-                <a:spcAft>
-                  <a:spcPts val="0"/>
-                </a:spcAft>
-              </a:pPr>
-              <a:r>
-                <a:rPr sz="979">
-                  <a:solidFill>
-                    <a:srgbClr val="000000">
-                      <a:alpha val="100000"/>
-                    </a:srgbClr>
-                  </a:solidFill>
-                  <a:latin typeface="Helvetica"/>
-                  <a:cs typeface="Helvetica"/>
-                </a:rPr>
-                <a:t>C</a:t>
-              </a:r>
-            </a:p>
-          </p:txBody>
-        </p:sp>
-        <p:sp>
-          <p:nvSpPr>
-            <p:cNvPr id="38" name="tx38"/>
-            <p:cNvSpPr/>
-            <p:nvPr/>
-          </p:nvSpPr>
-          <p:spPr>
-            <a:xfrm>
-              <a:off x="4917095" y="5905308"/>
-              <a:ext cx="89885" cy="89245"/>
-            </a:xfrm>
-            <a:prstGeom prst="rect">
-              <a:avLst/>
-            </a:prstGeom>
-            <a:noFill/>
-          </p:spPr>
-          <p:txBody>
-            <a:bodyPr lIns="0" rIns="0" tIns="0" bIns="0" anchorCtr="1" anchor="ctr" wrap="none"/>
-            <a:lstStyle/>
-            <a:p>
-              <a:pPr algn="l" marL="0" marR="0" indent="0">
-                <a:lnSpc>
-                  <a:spcPts val="979"/>
-                </a:lnSpc>
-                <a:spcBef>
-                  <a:spcPts val="0"/>
-                </a:spcBef>
-                <a:spcAft>
-                  <a:spcPts val="0"/>
-                </a:spcAft>
-              </a:pPr>
-              <a:r>
-                <a:rPr sz="979">
-                  <a:solidFill>
-                    <a:srgbClr val="000000">
-                      <a:alpha val="100000"/>
-                    </a:srgbClr>
-                  </a:solidFill>
-                  <a:latin typeface="Helvetica"/>
-                  <a:cs typeface="Helvetica"/>
-                </a:rPr>
-                <a:t>R</a:t>
-              </a:r>
-            </a:p>
-          </p:txBody>
-        </p:sp>
-        <p:sp>
-          <p:nvSpPr>
-            <p:cNvPr id="39" name="tx39"/>
-            <p:cNvSpPr/>
-            <p:nvPr/>
-          </p:nvSpPr>
-          <p:spPr>
-            <a:xfrm>
-              <a:off x="5006981" y="5884826"/>
-              <a:ext cx="68305" cy="109728"/>
-            </a:xfrm>
-            <a:prstGeom prst="rect">
-              <a:avLst/>
-            </a:prstGeom>
-            <a:noFill/>
-          </p:spPr>
-          <p:txBody>
-            <a:bodyPr lIns="0" rIns="0" tIns="0" bIns="0" anchorCtr="1" anchor="ctr" wrap="none"/>
-            <a:lstStyle/>
-            <a:p>
-              <a:pPr algn="l" marL="0" marR="0" indent="0">
-                <a:lnSpc>
-                  <a:spcPts val="979"/>
-                </a:lnSpc>
-                <a:spcBef>
-                  <a:spcPts val="0"/>
-                </a:spcBef>
-                <a:spcAft>
-                  <a:spcPts val="0"/>
-                </a:spcAft>
-              </a:pPr>
-              <a:r>
-                <a:rPr sz="979">
-                  <a:solidFill>
-                    <a:srgbClr val="000000">
-                      <a:alpha val="100000"/>
-                    </a:srgbClr>
-                  </a:solidFill>
-                  <a:latin typeface="Symbol"/>
-                  <a:cs typeface="Symbol"/>
-                </a:rPr>
-                <a:t>−</a:t>
-              </a:r>
-            </a:p>
-          </p:txBody>
-        </p:sp>
-        <p:sp>
-          <p:nvSpPr>
-            <p:cNvPr id="40" name="tx40"/>
-            <p:cNvSpPr/>
-            <p:nvPr/>
-          </p:nvSpPr>
-          <p:spPr>
-            <a:xfrm>
-              <a:off x="5075286" y="5905308"/>
-              <a:ext cx="89885" cy="89245"/>
-            </a:xfrm>
-            <a:prstGeom prst="rect">
-              <a:avLst/>
-            </a:prstGeom>
-            <a:noFill/>
-          </p:spPr>
-          <p:txBody>
-            <a:bodyPr lIns="0" rIns="0" tIns="0" bIns="0" anchorCtr="1" anchor="ctr" wrap="none"/>
-            <a:lstStyle/>
-            <a:p>
-              <a:pPr algn="l" marL="0" marR="0" indent="0">
-                <a:lnSpc>
-                  <a:spcPts val="979"/>
-                </a:lnSpc>
-                <a:spcBef>
-                  <a:spcPts val="0"/>
-                </a:spcBef>
-                <a:spcAft>
-                  <a:spcPts val="0"/>
-                </a:spcAft>
-              </a:pPr>
-              <a:r>
-                <a:rPr sz="979">
-                  <a:solidFill>
-                    <a:srgbClr val="000000">
-                      <a:alpha val="100000"/>
-                    </a:srgbClr>
-                  </a:solidFill>
-                  <a:latin typeface="Helvetica"/>
-                  <a:cs typeface="Helvetica"/>
-                </a:rPr>
-                <a:t>C</a:t>
-              </a:r>
-            </a:p>
-          </p:txBody>
-        </p:sp>
-        <p:sp>
-          <p:nvSpPr>
-            <p:cNvPr id="41" name="tx41"/>
-            <p:cNvSpPr/>
-            <p:nvPr/>
-          </p:nvSpPr>
-          <p:spPr>
-            <a:xfrm>
-              <a:off x="5165172" y="5905308"/>
-              <a:ext cx="83027" cy="89245"/>
-            </a:xfrm>
-            <a:prstGeom prst="rect">
-              <a:avLst/>
-            </a:prstGeom>
-            <a:noFill/>
-          </p:spPr>
-          <p:txBody>
-            <a:bodyPr lIns="0" rIns="0" tIns="0" bIns="0" anchorCtr="1" anchor="ctr" wrap="none"/>
-            <a:lstStyle/>
-            <a:p>
-              <a:pPr algn="l" marL="0" marR="0" indent="0">
-                <a:lnSpc>
-                  <a:spcPts val="979"/>
-                </a:lnSpc>
-                <a:spcBef>
-                  <a:spcPts val="0"/>
-                </a:spcBef>
-                <a:spcAft>
-                  <a:spcPts val="0"/>
-                </a:spcAft>
-              </a:pPr>
-              <a:r>
-                <a:rPr sz="979">
-                  <a:solidFill>
-                    <a:srgbClr val="000000">
-                      <a:alpha val="100000"/>
-                    </a:srgbClr>
-                  </a:solidFill>
-                  <a:latin typeface="Helvetica"/>
-                  <a:cs typeface="Helvetica"/>
-                </a:rPr>
-                <a:t>Y</a:t>
-              </a:r>
-            </a:p>
-          </p:txBody>
-        </p:sp>
-        <p:sp>
-          <p:nvSpPr>
-            <p:cNvPr id="42" name="tx42"/>
-            <p:cNvSpPr/>
-            <p:nvPr/>
-          </p:nvSpPr>
-          <p:spPr>
-            <a:xfrm>
-              <a:off x="5248199" y="5905308"/>
-              <a:ext cx="83027" cy="89245"/>
-            </a:xfrm>
-            <a:prstGeom prst="rect">
-              <a:avLst/>
-            </a:prstGeom>
-            <a:noFill/>
-          </p:spPr>
-          <p:txBody>
-            <a:bodyPr lIns="0" rIns="0" tIns="0" bIns="0" anchorCtr="1" anchor="ctr" wrap="none"/>
-            <a:lstStyle/>
-            <a:p>
-              <a:pPr algn="l" marL="0" marR="0" indent="0">
-                <a:lnSpc>
-                  <a:spcPts val="979"/>
-                </a:lnSpc>
-                <a:spcBef>
-                  <a:spcPts val="0"/>
-                </a:spcBef>
-                <a:spcAft>
-                  <a:spcPts val="0"/>
-                </a:spcAft>
-              </a:pPr>
-              <a:r>
-                <a:rPr sz="979">
-                  <a:solidFill>
-                    <a:srgbClr val="000000">
-                      <a:alpha val="100000"/>
-                    </a:srgbClr>
-                  </a:solidFill>
-                  <a:latin typeface="Helvetica"/>
-                  <a:cs typeface="Helvetica"/>
-                </a:rPr>
-                <a:t>S</a:t>
-              </a:r>
-            </a:p>
-          </p:txBody>
-        </p:sp>
-        <p:sp>
-          <p:nvSpPr>
-            <p:cNvPr id="43" name="tx43"/>
-            <p:cNvSpPr/>
-            <p:nvPr/>
-          </p:nvSpPr>
-          <p:spPr>
-            <a:xfrm>
-              <a:off x="5331227" y="5834415"/>
-              <a:ext cx="558149" cy="127558"/>
-            </a:xfrm>
-            <a:prstGeom prst="rect">
-              <a:avLst/>
-            </a:prstGeom>
-            <a:noFill/>
-          </p:spPr>
-          <p:txBody>
-            <a:bodyPr lIns="0" rIns="0" tIns="0" bIns="0" anchorCtr="1" anchor="ctr" wrap="none"/>
-            <a:lstStyle/>
-            <a:p>
-              <a:pPr algn="l" marL="0" marR="0" indent="0">
-                <a:lnSpc>
-                  <a:spcPts val="1400"/>
-                </a:lnSpc>
-                <a:spcBef>
-                  <a:spcPts val="0"/>
-                </a:spcBef>
-                <a:spcAft>
-                  <a:spcPts val="0"/>
-                </a:spcAft>
-              </a:pPr>
-              <a:r>
-                <a:rPr sz="1400">
-                  <a:solidFill>
-                    <a:srgbClr val="000000">
-                      <a:alpha val="100000"/>
-                    </a:srgbClr>
-                  </a:solidFill>
-                  <a:latin typeface="Helvetica"/>
-                  <a:cs typeface="Helvetica"/>
-                </a:rPr>
-                <a:t> − CrCl</a:t>
-              </a:r>
-            </a:p>
-          </p:txBody>
-        </p:sp>
-        <p:sp>
-          <p:nvSpPr>
-            <p:cNvPr id="44" name="tx44"/>
-            <p:cNvSpPr/>
-            <p:nvPr/>
-          </p:nvSpPr>
-          <p:spPr>
-            <a:xfrm>
-              <a:off x="5889377" y="5905308"/>
-              <a:ext cx="89885" cy="89245"/>
-            </a:xfrm>
-            <a:prstGeom prst="rect">
-              <a:avLst/>
-            </a:prstGeom>
-            <a:noFill/>
-          </p:spPr>
-          <p:txBody>
-            <a:bodyPr lIns="0" rIns="0" tIns="0" bIns="0" anchorCtr="1" anchor="ctr" wrap="none"/>
-            <a:lstStyle/>
-            <a:p>
-              <a:pPr algn="l" marL="0" marR="0" indent="0">
-                <a:lnSpc>
-                  <a:spcPts val="979"/>
-                </a:lnSpc>
-                <a:spcBef>
-                  <a:spcPts val="0"/>
-                </a:spcBef>
-                <a:spcAft>
-                  <a:spcPts val="0"/>
-                </a:spcAft>
-              </a:pPr>
-              <a:r>
-                <a:rPr sz="979">
-                  <a:solidFill>
-                    <a:srgbClr val="000000">
-                      <a:alpha val="100000"/>
-                    </a:srgbClr>
-                  </a:solidFill>
-                  <a:latin typeface="Helvetica"/>
-                  <a:cs typeface="Helvetica"/>
-                </a:rPr>
-                <a:t>C</a:t>
-              </a:r>
-            </a:p>
-          </p:txBody>
-        </p:sp>
-        <p:sp>
-          <p:nvSpPr>
-            <p:cNvPr id="45" name="tx45"/>
-            <p:cNvSpPr/>
-            <p:nvPr/>
-          </p:nvSpPr>
-          <p:spPr>
-            <a:xfrm>
-              <a:off x="5979262" y="5905308"/>
-              <a:ext cx="96743" cy="89245"/>
-            </a:xfrm>
-            <a:prstGeom prst="rect">
-              <a:avLst/>
-            </a:prstGeom>
-            <a:noFill/>
-          </p:spPr>
-          <p:txBody>
-            <a:bodyPr lIns="0" rIns="0" tIns="0" bIns="0" anchorCtr="1" anchor="ctr" wrap="none"/>
-            <a:lstStyle/>
-            <a:p>
-              <a:pPr algn="l" marL="0" marR="0" indent="0">
-                <a:lnSpc>
-                  <a:spcPts val="979"/>
-                </a:lnSpc>
-                <a:spcBef>
-                  <a:spcPts val="0"/>
-                </a:spcBef>
-                <a:spcAft>
-                  <a:spcPts val="0"/>
-                </a:spcAft>
-              </a:pPr>
-              <a:r>
-                <a:rPr sz="979">
-                  <a:solidFill>
-                    <a:srgbClr val="000000">
-                      <a:alpha val="100000"/>
-                    </a:srgbClr>
-                  </a:solidFill>
-                  <a:latin typeface="Helvetica"/>
-                  <a:cs typeface="Helvetica"/>
-                </a:rPr>
-                <a:t>G</a:t>
-              </a:r>
-            </a:p>
-          </p:txBody>
-        </p:sp>
-        <p:sp>
-          <p:nvSpPr>
-            <p:cNvPr id="46" name="tx46"/>
-            <p:cNvSpPr/>
-            <p:nvPr/>
-          </p:nvSpPr>
-          <p:spPr>
-            <a:xfrm>
-              <a:off x="6076006" y="5834415"/>
-              <a:ext cx="562904" cy="127558"/>
-            </a:xfrm>
-            <a:prstGeom prst="rect">
-              <a:avLst/>
-            </a:prstGeom>
-            <a:noFill/>
-          </p:spPr>
-          <p:txBody>
-            <a:bodyPr lIns="0" rIns="0" tIns="0" bIns="0" anchorCtr="1" anchor="ctr" wrap="none"/>
-            <a:lstStyle/>
-            <a:p>
-              <a:pPr algn="l" marL="0" marR="0" indent="0">
-                <a:lnSpc>
-                  <a:spcPts val="1400"/>
-                </a:lnSpc>
-                <a:spcBef>
-                  <a:spcPts val="0"/>
-                </a:spcBef>
-                <a:spcAft>
-                  <a:spcPts val="0"/>
-                </a:spcAft>
-              </a:pPr>
-              <a:r>
-                <a:rPr sz="1400">
-                  <a:solidFill>
-                    <a:srgbClr val="000000">
-                      <a:alpha val="100000"/>
-                    </a:srgbClr>
-                  </a:solidFill>
-                  <a:latin typeface="Helvetica"/>
-                  <a:cs typeface="Helvetica"/>
-                </a:rPr>
-                <a:t>) / CrCl</a:t>
-              </a:r>
-            </a:p>
-          </p:txBody>
-        </p:sp>
-        <p:sp>
-          <p:nvSpPr>
-            <p:cNvPr id="47" name="tx47"/>
-            <p:cNvSpPr/>
-            <p:nvPr/>
-          </p:nvSpPr>
-          <p:spPr>
-            <a:xfrm>
-              <a:off x="6638910" y="5905308"/>
-              <a:ext cx="89885" cy="89245"/>
-            </a:xfrm>
-            <a:prstGeom prst="rect">
-              <a:avLst/>
-            </a:prstGeom>
-            <a:noFill/>
-          </p:spPr>
-          <p:txBody>
-            <a:bodyPr lIns="0" rIns="0" tIns="0" bIns="0" anchorCtr="1" anchor="ctr" wrap="none"/>
-            <a:lstStyle/>
-            <a:p>
-              <a:pPr algn="l" marL="0" marR="0" indent="0">
-                <a:lnSpc>
-                  <a:spcPts val="979"/>
-                </a:lnSpc>
-                <a:spcBef>
-                  <a:spcPts val="0"/>
-                </a:spcBef>
-                <a:spcAft>
-                  <a:spcPts val="0"/>
-                </a:spcAft>
-              </a:pPr>
-              <a:r>
-                <a:rPr sz="979">
-                  <a:solidFill>
-                    <a:srgbClr val="000000">
-                      <a:alpha val="100000"/>
-                    </a:srgbClr>
-                  </a:solidFill>
-                  <a:latin typeface="Helvetica"/>
-                  <a:cs typeface="Helvetica"/>
-                </a:rPr>
-                <a:t>C</a:t>
-              </a:r>
-            </a:p>
-          </p:txBody>
-        </p:sp>
-        <p:sp>
-          <p:nvSpPr>
-            <p:cNvPr id="48" name="tx48"/>
-            <p:cNvSpPr/>
-            <p:nvPr/>
-          </p:nvSpPr>
-          <p:spPr>
-            <a:xfrm>
-              <a:off x="6728796" y="5905308"/>
-              <a:ext cx="96743" cy="89245"/>
-            </a:xfrm>
-            <a:prstGeom prst="rect">
-              <a:avLst/>
-            </a:prstGeom>
-            <a:noFill/>
-          </p:spPr>
-          <p:txBody>
-            <a:bodyPr lIns="0" rIns="0" tIns="0" bIns="0" anchorCtr="1" anchor="ctr" wrap="none"/>
-            <a:lstStyle/>
-            <a:p>
-              <a:pPr algn="l" marL="0" marR="0" indent="0">
-                <a:lnSpc>
-                  <a:spcPts val="979"/>
-                </a:lnSpc>
-                <a:spcBef>
-                  <a:spcPts val="0"/>
-                </a:spcBef>
-                <a:spcAft>
-                  <a:spcPts val="0"/>
-                </a:spcAft>
-              </a:pPr>
-              <a:r>
-                <a:rPr sz="979">
-                  <a:solidFill>
-                    <a:srgbClr val="000000">
-                      <a:alpha val="100000"/>
-                    </a:srgbClr>
-                  </a:solidFill>
-                  <a:latin typeface="Helvetica"/>
-                  <a:cs typeface="Helvetica"/>
-                </a:rPr>
-                <a:t>G</a:t>
-              </a:r>
-            </a:p>
-          </p:txBody>
-        </p:sp>
-        <p:sp>
-          <p:nvSpPr>
-            <p:cNvPr id="49" name="tx49"/>
+            <p:cNvPr id="50" name="tx50"/>
             <p:cNvSpPr/>
             <p:nvPr/>
           </p:nvSpPr>
           <p:spPr>
             <a:xfrm rot="-5400000">
-              <a:off x="-37527" y="3827572"/>
+              <a:off x="-37527" y="3835619"/>
               <a:ext cx="1294150" cy="127558"/>
             </a:xfrm>
             <a:prstGeom prst="rect">
@@ -5695,14 +5714,14 @@
         </p:sp>
         <p:sp>
           <p:nvSpPr>
-            <p:cNvPr id="50" name="tx50"/>
+            <p:cNvPr id="51" name="tx51"/>
             <p:cNvSpPr/>
             <p:nvPr/>
           </p:nvSpPr>
           <p:spPr>
             <a:xfrm>
               <a:off x="915645" y="1977589"/>
-              <a:ext cx="5929701" cy="109362"/>
+              <a:ext cx="3712646" cy="91165"/>
             </a:xfrm>
             <a:prstGeom prst="rect">
               <a:avLst/>
@@ -5715,7 +5734,7 @@
             <a:p>
               <a:pPr algn="l" marL="0" marR="0" indent="0">
                 <a:lnSpc>
-                  <a:spcPts val="1200"/>
+                  <a:spcPts val="1000"/>
                 </a:lnSpc>
                 <a:spcBef>
                   <a:spcPts val="0"/>
@@ -5725,7 +5744,7 @@
                 </a:spcAft>
               </a:pPr>
               <a:r>
-                <a:rPr sz="1200">
+                <a:rPr sz="1000">
                   <a:solidFill>
                     <a:srgbClr val="404040">
                       <a:alpha val="100000"/>
@@ -5734,14 +5753,14 @@
                   <a:latin typeface="Helvetica"/>
                   <a:cs typeface="Helvetica"/>
                 </a:rPr>
-                <a:t>subHR = 0.86 (95% CI 0.69-1.06), p = 0.154   (per 0.1-unit increase in eGFR difference)</a:t>
+                <a:t>subHR = 1.17 (95% CI 0.94-1.45), p = 0.154   (per 10% decrease)</a:t>
               </a:r>
             </a:p>
           </p:txBody>
         </p:sp>
         <p:sp>
           <p:nvSpPr>
-            <p:cNvPr id="51" name="tx51"/>
+            <p:cNvPr id="52" name="tx52"/>
             <p:cNvSpPr/>
             <p:nvPr/>
           </p:nvSpPr>
